--- a/docs/competition/2026-guochuang/output/Agent-eBPF-Filter-项目答辩路演PPT.pptx
+++ b/docs/competition/2026-guochuang/output/Agent-eBPF-Filter-项目答辩路演PPT.pptx
@@ -4,6 +4,9 @@
   <p:sldMasterIdLst>
     <p:sldMasterId id="2147483648" r:id="rId1"/>
   </p:sldMasterIdLst>
+  <p:notesMasterIdLst>
+    <p:notesMasterId r:id="rId20"/>
+  </p:notesMasterIdLst>
   <p:sldIdLst>
     <p:sldId id="256" r:id="rId2"/>
     <p:sldId id="257" r:id="rId3"/>
@@ -24,10 +27,7 @@
     <p:sldId id="272" r:id="rId18"/>
     <p:sldId id="273" r:id="rId19"/>
   </p:sldIdLst>
-  <p:notesMasterIdLst>
-    <p:notesMasterId r:id="rId20"/>
-  </p:notesMasterIdLst>
-  <p:sldSz cx="9144000" cy="5143500"/>
+  <p:sldSz cx="9144000" cy="5143500" type="screen16x9"/>
   <p:notesSz cx="5143500" cy="9144000"/>
   <p:defaultTextStyle>
     <a:lvl1pPr marL="0" algn="l" defTabSz="914400" rtl="0" eaLnBrk="1" latinLnBrk="0" hangingPunct="1">
@@ -121,6 +121,11 @@
       </a:defRPr>
     </a:lvl9pPr>
   </p:defaultTextStyle>
+  <p:extLst>
+    <p:ext uri="{EFAFB233-063F-42B5-8137-9DF3F51BA10A}">
+      <p15:sldGuideLst xmlns:p15="http://schemas.microsoft.com/office/powerpoint/2012/main"/>
+    </p:ext>
+  </p:extLst>
 </p:presentation>
 </file>
 
@@ -146,234 +151,10 @@
           <a:chExt cx="0" cy="0"/>
         </a:xfrm>
       </p:grpSpPr>
-      <p:sp>
-        <p:nvSpPr>
-          <p:cNvPr id="2" name="Header Placeholder 1"/>
-          <p:cNvSpPr>
-            <a:spLocks noGrp="1"/>
-          </p:cNvSpPr>
-          <p:nvPr>
-            <p:ph type="hdr" sz="quarter"/>
-          </p:nvPr>
-        </p:nvSpPr>
-        <p:spPr>
-          <a:xfrm>
-            <a:off x="0" y="0"/>
-            <a:ext cx="2971800" cy="458788"/>
-          </a:xfrm>
-          <a:prstGeom prst="rect">
-            <a:avLst/>
-          </a:prstGeom>
-        </p:spPr>
-        <p:txBody>
-          <a:bodyPr vert="horz" lIns="91440" tIns="45720" rIns="91440" bIns="45720" rtlCol="0"/>
-          <a:lstStyle>
-            <a:lvl1pPr algn="l">
-              <a:defRPr sz="1200"/>
-            </a:lvl1pPr>
-          </a:lstStyle>
-          <a:p>
-            <a:endParaRPr lang="en-US"/>
-          </a:p>
-        </p:txBody>
-      </p:sp>
-      <p:sp>
-        <p:nvSpPr>
-          <p:cNvPr id="3" name="Date Placeholder 2"/>
-          <p:cNvSpPr>
-            <a:spLocks noGrp="1"/>
-          </p:cNvSpPr>
-          <p:nvPr>
-            <p:ph type="dt" idx="1"/>
-          </p:nvPr>
-        </p:nvSpPr>
-        <p:spPr>
-          <a:xfrm>
-            <a:off x="3884613" y="0"/>
-            <a:ext cx="2971800" cy="458788"/>
-          </a:xfrm>
-          <a:prstGeom prst="rect">
-            <a:avLst/>
-          </a:prstGeom>
-        </p:spPr>
-        <p:txBody>
-          <a:bodyPr vert="horz" lIns="91440" tIns="45720" rIns="91440" bIns="45720" rtlCol="0"/>
-          <a:lstStyle>
-            <a:lvl1pPr algn="r">
-              <a:defRPr sz="1200"/>
-            </a:lvl1pPr>
-          </a:lstStyle>
-          <a:p>
-            <a:fld id="{5282F153-3F37-0F45-9E97-73ACFA13230C}" type="datetimeFigureOut">
-              <a:rPr lang="en-US"/>
-              <a:t>7/23/19</a:t>
-            </a:fld>
-            <a:endParaRPr lang="en-US"/>
-          </a:p>
-        </p:txBody>
-      </p:sp>
-      <p:sp>
-        <p:nvSpPr>
-          <p:cNvPr id="4" name="Slide Image Placeholder 3"/>
-          <p:cNvSpPr>
-            <a:spLocks noGrp="1" noRot="1" noChangeAspect="1"/>
-          </p:cNvSpPr>
-          <p:nvPr>
-            <p:ph type="sldImg" idx="2"/>
-          </p:nvPr>
-        </p:nvSpPr>
-        <p:spPr>
-          <a:xfrm>
-            <a:off x="685800" y="1143000"/>
-            <a:ext cx="5486400" cy="3086100"/>
-          </a:xfrm>
-          <a:prstGeom prst="rect">
-            <a:avLst/>
-          </a:prstGeom>
-          <a:noFill/>
-          <a:ln w="12700">
-            <a:solidFill>
-              <a:prstClr val="black"/>
-            </a:solidFill>
-          </a:ln>
-        </p:spPr>
-        <p:txBody>
-          <a:bodyPr vert="horz" lIns="91440" tIns="45720" rIns="91440" bIns="45720" rtlCol="0" anchor="ctr"/>
-          <a:lstStyle/>
-          <a:p>
-            <a:endParaRPr lang="en-US"/>
-          </a:p>
-        </p:txBody>
-      </p:sp>
-      <p:sp>
-        <p:nvSpPr>
-          <p:cNvPr id="5" name="Notes Placeholder 4"/>
-          <p:cNvSpPr>
-            <a:spLocks noGrp="1"/>
-          </p:cNvSpPr>
-          <p:nvPr>
-            <p:ph type="body" sz="quarter" idx="3"/>
-          </p:nvPr>
-        </p:nvSpPr>
-        <p:spPr>
-          <a:xfrm>
-            <a:off x="685800" y="4400550"/>
-            <a:ext cx="5486400" cy="3600450"/>
-          </a:xfrm>
-          <a:prstGeom prst="rect">
-            <a:avLst/>
-          </a:prstGeom>
-        </p:spPr>
-        <p:txBody>
-          <a:bodyPr vert="horz" lIns="91440" tIns="45720" rIns="91440" bIns="45720" rtlCol="0"/>
-          <a:lstStyle/>
-          <a:p>
-            <a:pPr lvl="0"/>
-            <a:r>
-              <a:rPr lang="en-US"/>
-              <a:t>Click to edit Master text styles</a:t>
-            </a:r>
-          </a:p>
-          <a:p>
-            <a:pPr lvl="1"/>
-            <a:r>
-              <a:rPr lang="en-US"/>
-              <a:t>Second level</a:t>
-            </a:r>
-          </a:p>
-          <a:p>
-            <a:pPr lvl="2"/>
-            <a:r>
-              <a:rPr lang="en-US"/>
-              <a:t>Third level</a:t>
-            </a:r>
-          </a:p>
-          <a:p>
-            <a:pPr lvl="3"/>
-            <a:r>
-              <a:rPr lang="en-US"/>
-              <a:t>Fourth level</a:t>
-            </a:r>
-          </a:p>
-          <a:p>
-            <a:pPr lvl="4"/>
-            <a:r>
-              <a:rPr lang="en-US"/>
-              <a:t>Fifth level</a:t>
-            </a:r>
-          </a:p>
-        </p:txBody>
-      </p:sp>
-      <p:sp>
-        <p:nvSpPr>
-          <p:cNvPr id="6" name="Footer Placeholder 5"/>
-          <p:cNvSpPr>
-            <a:spLocks noGrp="1"/>
-          </p:cNvSpPr>
-          <p:nvPr>
-            <p:ph type="ftr" sz="quarter" idx="4"/>
-          </p:nvPr>
-        </p:nvSpPr>
-        <p:spPr>
-          <a:xfrm>
-            <a:off x="0" y="8685213"/>
-            <a:ext cx="2971800" cy="458787"/>
-          </a:xfrm>
-          <a:prstGeom prst="rect">
-            <a:avLst/>
-          </a:prstGeom>
-        </p:spPr>
-        <p:txBody>
-          <a:bodyPr vert="horz" lIns="91440" tIns="45720" rIns="91440" bIns="45720" rtlCol="0" anchor="b"/>
-          <a:lstStyle>
-            <a:lvl1pPr algn="l">
-              <a:defRPr sz="1200"/>
-            </a:lvl1pPr>
-          </a:lstStyle>
-          <a:p>
-            <a:endParaRPr lang="en-US"/>
-          </a:p>
-        </p:txBody>
-      </p:sp>
-      <p:sp>
-        <p:nvSpPr>
-          <p:cNvPr id="7" name="Slide Number Placeholder 6"/>
-          <p:cNvSpPr>
-            <a:spLocks noGrp="1"/>
-          </p:cNvSpPr>
-          <p:nvPr>
-            <p:ph type="sldNum" sz="quarter" idx="5"/>
-          </p:nvPr>
-        </p:nvSpPr>
-        <p:spPr>
-          <a:xfrm>
-            <a:off x="3884613" y="8685213"/>
-            <a:ext cx="2971800" cy="458787"/>
-          </a:xfrm>
-          <a:prstGeom prst="rect">
-            <a:avLst/>
-          </a:prstGeom>
-        </p:spPr>
-        <p:txBody>
-          <a:bodyPr vert="horz" lIns="91440" tIns="45720" rIns="91440" bIns="45720" rtlCol="0" anchor="b"/>
-          <a:lstStyle>
-            <a:lvl1pPr algn="r">
-              <a:defRPr sz="1200"/>
-            </a:lvl1pPr>
-          </a:lstStyle>
-          <a:p>
-            <a:fld id="{CE5E9CC1-C706-0F49-92D6-E571CC5EEA8F}" type="slidenum">
-              <a:rPr lang="en-US"/>
-              <a:t>‹#›</a:t>
-            </a:fld>
-            <a:endParaRPr lang="en-US"/>
-          </a:p>
-        </p:txBody>
-      </p:sp>
     </p:spTree>
     <p:extLst>
       <p:ext uri="{BB962C8B-B14F-4D97-AF65-F5344CB8AC3E}">
-        <p14:creationId xmlns:p14="http://schemas.microsoft.com/office/powerpoint/2010/main" val="1024086991"/>
+        <p14:creationId xmlns:p14="http://schemas.microsoft.com/office/powerpoint/2010/main" val="3643561587"/>
       </p:ext>
     </p:extLst>
   </p:cSld>
@@ -517,10 +298,6 @@
           <a:bodyPr/>
           <a:lstStyle/>
           <a:p>
-            <a:r>
-              <a:rPr lang="en-US" dirty="0"/>
-              <a:t/>
-            </a:r>
             <a:endParaRPr lang="en-US" dirty="0"/>
           </a:p>
         </p:txBody>
@@ -605,10 +382,6 @@
           <a:bodyPr/>
           <a:lstStyle/>
           <a:p>
-            <a:r>
-              <a:rPr lang="en-US" dirty="0"/>
-              <a:t/>
-            </a:r>
             <a:endParaRPr lang="en-US" dirty="0"/>
           </a:p>
         </p:txBody>
@@ -693,10 +466,6 @@
           <a:bodyPr/>
           <a:lstStyle/>
           <a:p>
-            <a:r>
-              <a:rPr lang="en-US" dirty="0"/>
-              <a:t/>
-            </a:r>
             <a:endParaRPr lang="en-US" dirty="0"/>
           </a:p>
         </p:txBody>
@@ -781,10 +550,6 @@
           <a:bodyPr/>
           <a:lstStyle/>
           <a:p>
-            <a:r>
-              <a:rPr lang="en-US" dirty="0"/>
-              <a:t/>
-            </a:r>
             <a:endParaRPr lang="en-US" dirty="0"/>
           </a:p>
         </p:txBody>
@@ -869,10 +634,6 @@
           <a:bodyPr/>
           <a:lstStyle/>
           <a:p>
-            <a:r>
-              <a:rPr lang="en-US" dirty="0"/>
-              <a:t/>
-            </a:r>
             <a:endParaRPr lang="en-US" dirty="0"/>
           </a:p>
         </p:txBody>
@@ -957,10 +718,6 @@
           <a:bodyPr/>
           <a:lstStyle/>
           <a:p>
-            <a:r>
-              <a:rPr lang="en-US" dirty="0"/>
-              <a:t/>
-            </a:r>
             <a:endParaRPr lang="en-US" dirty="0"/>
           </a:p>
         </p:txBody>
@@ -1045,10 +802,6 @@
           <a:bodyPr/>
           <a:lstStyle/>
           <a:p>
-            <a:r>
-              <a:rPr lang="en-US" dirty="0"/>
-              <a:t/>
-            </a:r>
             <a:endParaRPr lang="en-US" dirty="0"/>
           </a:p>
         </p:txBody>
@@ -1133,10 +886,6 @@
           <a:bodyPr/>
           <a:lstStyle/>
           <a:p>
-            <a:r>
-              <a:rPr lang="en-US" dirty="0"/>
-              <a:t/>
-            </a:r>
             <a:endParaRPr lang="en-US" dirty="0"/>
           </a:p>
         </p:txBody>
@@ -1221,10 +970,6 @@
           <a:bodyPr/>
           <a:lstStyle/>
           <a:p>
-            <a:r>
-              <a:rPr lang="en-US" dirty="0"/>
-              <a:t/>
-            </a:r>
             <a:endParaRPr lang="en-US" dirty="0"/>
           </a:p>
         </p:txBody>
@@ -1309,10 +1054,6 @@
           <a:bodyPr/>
           <a:lstStyle/>
           <a:p>
-            <a:r>
-              <a:rPr lang="en-US" dirty="0"/>
-              <a:t/>
-            </a:r>
             <a:endParaRPr lang="en-US" dirty="0"/>
           </a:p>
         </p:txBody>
@@ -1397,10 +1138,6 @@
           <a:bodyPr/>
           <a:lstStyle/>
           <a:p>
-            <a:r>
-              <a:rPr lang="en-US" dirty="0"/>
-              <a:t/>
-            </a:r>
             <a:endParaRPr lang="en-US" dirty="0"/>
           </a:p>
         </p:txBody>
@@ -1485,10 +1222,6 @@
           <a:bodyPr/>
           <a:lstStyle/>
           <a:p>
-            <a:r>
-              <a:rPr lang="en-US" dirty="0"/>
-              <a:t/>
-            </a:r>
             <a:endParaRPr lang="en-US" dirty="0"/>
           </a:p>
         </p:txBody>
@@ -1573,10 +1306,6 @@
           <a:bodyPr/>
           <a:lstStyle/>
           <a:p>
-            <a:r>
-              <a:rPr lang="en-US" dirty="0"/>
-              <a:t/>
-            </a:r>
             <a:endParaRPr lang="en-US" dirty="0"/>
           </a:p>
         </p:txBody>
@@ -1661,10 +1390,6 @@
           <a:bodyPr/>
           <a:lstStyle/>
           <a:p>
-            <a:r>
-              <a:rPr lang="en-US" dirty="0"/>
-              <a:t/>
-            </a:r>
             <a:endParaRPr lang="en-US" dirty="0"/>
           </a:p>
         </p:txBody>
@@ -1749,10 +1474,6 @@
           <a:bodyPr/>
           <a:lstStyle/>
           <a:p>
-            <a:r>
-              <a:rPr lang="en-US" dirty="0"/>
-              <a:t/>
-            </a:r>
             <a:endParaRPr lang="en-US" dirty="0"/>
           </a:p>
         </p:txBody>
@@ -1837,10 +1558,6 @@
           <a:bodyPr/>
           <a:lstStyle/>
           <a:p>
-            <a:r>
-              <a:rPr lang="en-US" dirty="0"/>
-              <a:t/>
-            </a:r>
             <a:endParaRPr lang="en-US" dirty="0"/>
           </a:p>
         </p:txBody>
@@ -1925,10 +1642,6 @@
           <a:bodyPr/>
           <a:lstStyle/>
           <a:p>
-            <a:r>
-              <a:rPr lang="en-US" dirty="0"/>
-              <a:t/>
-            </a:r>
             <a:endParaRPr lang="en-US" dirty="0"/>
           </a:p>
         </p:txBody>
@@ -2013,10 +1726,6 @@
           <a:bodyPr/>
           <a:lstStyle/>
           <a:p>
-            <a:r>
-              <a:rPr lang="en-US" dirty="0"/>
-              <a:t/>
-            </a:r>
             <a:endParaRPr lang="en-US" dirty="0"/>
           </a:p>
         </p:txBody>
@@ -2090,6 +1799,11 @@
 <file path=ppt/slideMasters/slideMaster1.xml><?xml version="1.0" encoding="utf-8"?>
 <p:sldMaster xmlns:a="http://schemas.openxmlformats.org/drawingml/2006/main" xmlns:r="http://schemas.openxmlformats.org/officeDocument/2006/relationships" xmlns:p="http://schemas.openxmlformats.org/presentationml/2006/main">
   <p:cSld>
+    <p:bg>
+      <p:bgRef idx="1001">
+        <a:schemeClr val="bg1"/>
+      </p:bgRef>
+    </p:bg>
     <p:spTree>
       <p:nvGrpSpPr>
         <p:cNvPr id="1" name=""/>
@@ -2372,6 +2086,7 @@
         <a:solidFill>
           <a:srgbClr val="0B1220"/>
         </a:solidFill>
+        <a:effectLst/>
       </p:bgPr>
     </p:bg>
     <p:spTree>
@@ -2467,7 +2182,7 @@
           </a:bodyPr>
           <a:lstStyle/>
           <a:p>
-            <a:pPr algn="ctr" indent="0" marL="0">
+            <a:pPr marL="0" indent="0" algn="ctr">
               <a:buNone/>
             </a:pPr>
             <a:r>
@@ -2537,7 +2252,7 @@
           </a:bodyPr>
           <a:lstStyle/>
           <a:p>
-            <a:pPr algn="ctr" indent="0" marL="0">
+            <a:pPr marL="0" indent="0" algn="ctr">
               <a:buNone/>
             </a:pPr>
             <a:r>
@@ -2607,7 +2322,7 @@
           </a:bodyPr>
           <a:lstStyle/>
           <a:p>
-            <a:pPr algn="ctr" indent="0" marL="0">
+            <a:pPr marL="0" indent="0" algn="ctr">
               <a:buNone/>
             </a:pPr>
             <a:r>
@@ -2648,7 +2363,7 @@
           </a:bodyPr>
           <a:lstStyle/>
           <a:p>
-            <a:pPr algn="l" indent="0" marL="0">
+            <a:pPr marL="0" indent="0" algn="l">
               <a:buNone/>
             </a:pPr>
             <a:r>
@@ -2689,7 +2404,7 @@
           </a:bodyPr>
           <a:lstStyle/>
           <a:p>
-            <a:pPr algn="l" indent="0" marL="0">
+            <a:pPr marL="0" indent="0" algn="l">
               <a:buNone/>
             </a:pPr>
             <a:r>
@@ -2706,7 +2421,7 @@
             <a:endParaRPr lang="en-US" sz="2900" dirty="0"/>
           </a:p>
           <a:p>
-            <a:pPr algn="l" indent="0" marL="0">
+            <a:pPr marL="0" indent="0" algn="l">
               <a:buNone/>
             </a:pPr>
             <a:r>
@@ -2747,7 +2462,7 @@
           </a:bodyPr>
           <a:lstStyle/>
           <a:p>
-            <a:pPr algn="l" indent="0" marL="0">
+            <a:pPr marL="0" indent="0" algn="l">
               <a:buNone/>
             </a:pPr>
             <a:r>
@@ -2791,7 +2506,7 @@
             <a:prstDash val="solid"/>
           </a:ln>
           <a:effectLst>
-            <a:outerShdw sx="100000" sy="100000" kx="0" ky="0" algn="bl" rotWithShape="0" blurRad="12700" dist="50800" dir="2700000">
+            <a:outerShdw blurRad="12700" dist="50800" dir="2700000" algn="bl" rotWithShape="0">
               <a:srgbClr val="000000">
                 <a:alpha val="10000"/>
               </a:srgbClr>
@@ -2822,7 +2537,7 @@
           </a:bodyPr>
           <a:lstStyle/>
           <a:p>
-            <a:pPr algn="ctr" indent="0" marL="0">
+            <a:pPr marL="0" indent="0" algn="ctr">
               <a:buNone/>
             </a:pPr>
             <a:r>
@@ -2863,7 +2578,7 @@
           </a:bodyPr>
           <a:lstStyle/>
           <a:p>
-            <a:pPr algn="ctr" indent="0" marL="0">
+            <a:pPr marL="0" indent="0" algn="ctr">
               <a:buNone/>
             </a:pPr>
             <a:r>
@@ -2907,7 +2622,7 @@
             <a:prstDash val="solid"/>
           </a:ln>
           <a:effectLst>
-            <a:outerShdw sx="100000" sy="100000" kx="0" ky="0" algn="bl" rotWithShape="0" blurRad="12700" dist="50800" dir="2700000">
+            <a:outerShdw blurRad="12700" dist="50800" dir="2700000" algn="bl" rotWithShape="0">
               <a:srgbClr val="000000">
                 <a:alpha val="10000"/>
               </a:srgbClr>
@@ -2938,7 +2653,7 @@
           </a:bodyPr>
           <a:lstStyle/>
           <a:p>
-            <a:pPr algn="ctr" indent="0" marL="0">
+            <a:pPr marL="0" indent="0" algn="ctr">
               <a:buNone/>
             </a:pPr>
             <a:r>
@@ -2979,7 +2694,7 @@
           </a:bodyPr>
           <a:lstStyle/>
           <a:p>
-            <a:pPr algn="ctr" indent="0" marL="0">
+            <a:pPr marL="0" indent="0" algn="ctr">
               <a:buNone/>
             </a:pPr>
             <a:r>
@@ -3023,7 +2738,7 @@
             <a:prstDash val="solid"/>
           </a:ln>
           <a:effectLst>
-            <a:outerShdw sx="100000" sy="100000" kx="0" ky="0" algn="bl" rotWithShape="0" blurRad="12700" dist="50800" dir="2700000">
+            <a:outerShdw blurRad="12700" dist="50800" dir="2700000" algn="bl" rotWithShape="0">
               <a:srgbClr val="000000">
                 <a:alpha val="10000"/>
               </a:srgbClr>
@@ -3054,7 +2769,7 @@
           </a:bodyPr>
           <a:lstStyle/>
           <a:p>
-            <a:pPr algn="ctr" indent="0" marL="0">
+            <a:pPr marL="0" indent="0" algn="ctr">
               <a:buNone/>
             </a:pPr>
             <a:r>
@@ -3095,7 +2810,7 @@
           </a:bodyPr>
           <a:lstStyle/>
           <a:p>
-            <a:pPr algn="ctr" indent="0" marL="0">
+            <a:pPr marL="0" indent="0" algn="ctr">
               <a:buNone/>
             </a:pPr>
             <a:r>
@@ -3163,7 +2878,7 @@
           </a:bodyPr>
           <a:lstStyle/>
           <a:p>
-            <a:pPr algn="ctr" indent="0" marL="0">
+            <a:pPr marL="0" indent="0" algn="ctr">
               <a:buNone/>
             </a:pPr>
             <a:r>
@@ -3204,7 +2919,7 @@
           </a:bodyPr>
           <a:lstStyle/>
           <a:p>
-            <a:pPr algn="ctr" indent="0" marL="0">
+            <a:pPr marL="0" indent="0" algn="ctr">
               <a:buNone/>
             </a:pPr>
             <a:r>
@@ -3221,7 +2936,7 @@
             <a:endParaRPr lang="en-US" sz="1500" dirty="0"/>
           </a:p>
           <a:p>
-            <a:pPr algn="ctr" indent="0" marL="0">
+            <a:pPr marL="0" indent="0" algn="ctr">
               <a:buNone/>
             </a:pPr>
             <a:r>
@@ -3238,7 +2953,7 @@
             <a:endParaRPr lang="en-US" sz="1500" dirty="0"/>
           </a:p>
           <a:p>
-            <a:pPr algn="ctr" indent="0" marL="0">
+            <a:pPr marL="0" indent="0" algn="ctr">
               <a:buNone/>
             </a:pPr>
             <a:r>
@@ -3255,7 +2970,7 @@
             <a:endParaRPr lang="en-US" sz="1500" dirty="0"/>
           </a:p>
           <a:p>
-            <a:pPr algn="ctr" indent="0" marL="0">
+            <a:pPr marL="0" indent="0" algn="ctr">
               <a:buNone/>
             </a:pPr>
             <a:r>
@@ -3272,7 +2987,7 @@
             <a:endParaRPr lang="en-US" sz="1500" dirty="0"/>
           </a:p>
           <a:p>
-            <a:pPr algn="ctr" indent="0" marL="0">
+            <a:pPr marL="0" indent="0" algn="ctr">
               <a:buNone/>
             </a:pPr>
             <a:r>
@@ -3313,7 +3028,7 @@
           </a:bodyPr>
           <a:lstStyle/>
           <a:p>
-            <a:pPr algn="ctr" indent="0" marL="0">
+            <a:pPr marL="0" indent="0" algn="ctr">
               <a:buNone/>
             </a:pPr>
             <a:r>
@@ -3347,6 +3062,7 @@
         <a:solidFill>
           <a:srgbClr val="F8FAFC"/>
         </a:solidFill>
+        <a:effectLst/>
       </p:bgPr>
     </p:bg>
     <p:spTree>
@@ -3415,7 +3131,7 @@
           </a:bodyPr>
           <a:lstStyle/>
           <a:p>
-            <a:pPr algn="ctr" indent="0" marL="0">
+            <a:pPr marL="0" indent="0" algn="ctr">
               <a:buNone/>
             </a:pPr>
             <a:r>
@@ -3456,7 +3172,7 @@
           </a:bodyPr>
           <a:lstStyle/>
           <a:p>
-            <a:pPr algn="l" indent="0" marL="0">
+            <a:pPr marL="0" indent="0" algn="l">
               <a:buNone/>
             </a:pPr>
             <a:r>
@@ -3497,7 +3213,7 @@
           </a:bodyPr>
           <a:lstStyle/>
           <a:p>
-            <a:pPr algn="l" indent="0" marL="0">
+            <a:pPr marL="0" indent="0" algn="l">
               <a:buNone/>
             </a:pPr>
             <a:r>
@@ -3594,7 +3310,7 @@
           </a:bodyPr>
           <a:lstStyle/>
           <a:p>
-            <a:pPr algn="ctr" indent="0" marL="0">
+            <a:pPr marL="0" indent="0" algn="ctr">
               <a:buNone/>
             </a:pPr>
             <a:r>
@@ -3638,7 +3354,7 @@
             <a:prstDash val="solid"/>
           </a:ln>
           <a:effectLst>
-            <a:outerShdw sx="100000" sy="100000" kx="0" ky="0" algn="bl" rotWithShape="0" blurRad="12700" dist="50800" dir="2700000">
+            <a:outerShdw blurRad="12700" dist="50800" dir="2700000" algn="bl" rotWithShape="0">
               <a:srgbClr val="000000">
                 <a:alpha val="10000"/>
               </a:srgbClr>
@@ -3696,7 +3412,7 @@
           </a:bodyPr>
           <a:lstStyle/>
           <a:p>
-            <a:pPr algn="l" indent="0" marL="0">
+            <a:pPr marL="0" indent="0" algn="l">
               <a:buNone/>
             </a:pPr>
             <a:r>
@@ -3737,7 +3453,7 @@
           </a:bodyPr>
           <a:lstStyle/>
           <a:p>
-            <a:pPr algn="l" indent="0" marL="0">
+            <a:pPr marL="0" indent="0" algn="l">
               <a:buNone/>
             </a:pPr>
             <a:r>
@@ -3781,7 +3497,7 @@
             <a:prstDash val="solid"/>
           </a:ln>
           <a:effectLst>
-            <a:outerShdw sx="100000" sy="100000" kx="0" ky="0" algn="bl" rotWithShape="0" blurRad="12700" dist="50800" dir="2700000">
+            <a:outerShdw blurRad="12700" dist="50800" dir="2700000" algn="bl" rotWithShape="0">
               <a:srgbClr val="000000">
                 <a:alpha val="10000"/>
               </a:srgbClr>
@@ -3839,7 +3555,7 @@
           </a:bodyPr>
           <a:lstStyle/>
           <a:p>
-            <a:pPr algn="l" indent="0" marL="0">
+            <a:pPr marL="0" indent="0" algn="l">
               <a:buNone/>
             </a:pPr>
             <a:r>
@@ -3880,7 +3596,7 @@
           </a:bodyPr>
           <a:lstStyle/>
           <a:p>
-            <a:pPr algn="l" indent="0" marL="0">
+            <a:pPr marL="0" indent="0" algn="l">
               <a:buNone/>
             </a:pPr>
             <a:r>
@@ -3924,7 +3640,7 @@
             <a:prstDash val="solid"/>
           </a:ln>
           <a:effectLst>
-            <a:outerShdw sx="100000" sy="100000" kx="0" ky="0" algn="bl" rotWithShape="0" blurRad="12700" dist="50800" dir="2700000">
+            <a:outerShdw blurRad="12700" dist="50800" dir="2700000" algn="bl" rotWithShape="0">
               <a:srgbClr val="000000">
                 <a:alpha val="10000"/>
               </a:srgbClr>
@@ -3982,7 +3698,7 @@
           </a:bodyPr>
           <a:lstStyle/>
           <a:p>
-            <a:pPr algn="l" indent="0" marL="0">
+            <a:pPr marL="0" indent="0" algn="l">
               <a:buNone/>
             </a:pPr>
             <a:r>
@@ -4023,7 +3739,7 @@
           </a:bodyPr>
           <a:lstStyle/>
           <a:p>
-            <a:pPr algn="l" indent="0" marL="0">
+            <a:pPr marL="0" indent="0" algn="l">
               <a:buNone/>
             </a:pPr>
             <a:r>
@@ -4067,7 +3783,7 @@
             <a:prstDash val="solid"/>
           </a:ln>
           <a:effectLst>
-            <a:outerShdw sx="100000" sy="100000" kx="0" ky="0" algn="bl" rotWithShape="0" blurRad="12700" dist="50800" dir="2700000">
+            <a:outerShdw blurRad="12700" dist="50800" dir="2700000" algn="bl" rotWithShape="0">
               <a:srgbClr val="000000">
                 <a:alpha val="10000"/>
               </a:srgbClr>
@@ -4125,7 +3841,7 @@
           </a:bodyPr>
           <a:lstStyle/>
           <a:p>
-            <a:pPr algn="l" indent="0" marL="0">
+            <a:pPr marL="0" indent="0" algn="l">
               <a:buNone/>
             </a:pPr>
             <a:r>
@@ -4166,7 +3882,7 @@
           </a:bodyPr>
           <a:lstStyle/>
           <a:p>
-            <a:pPr algn="l" indent="0" marL="0">
+            <a:pPr marL="0" indent="0" algn="l">
               <a:buNone/>
             </a:pPr>
             <a:r>
@@ -4234,7 +3950,7 @@
           </a:bodyPr>
           <a:lstStyle/>
           <a:p>
-            <a:pPr algn="ctr" indent="0" marL="0">
+            <a:pPr marL="0" indent="0" algn="ctr">
               <a:buNone/>
             </a:pPr>
             <a:r>
@@ -4268,6 +3984,7 @@
         <a:solidFill>
           <a:srgbClr val="F8FAFC"/>
         </a:solidFill>
+        <a:effectLst/>
       </p:bgPr>
     </p:bg>
     <p:spTree>
@@ -4336,7 +4053,7 @@
           </a:bodyPr>
           <a:lstStyle/>
           <a:p>
-            <a:pPr algn="ctr" indent="0" marL="0">
+            <a:pPr marL="0" indent="0" algn="ctr">
               <a:buNone/>
             </a:pPr>
             <a:r>
@@ -4377,7 +4094,7 @@
           </a:bodyPr>
           <a:lstStyle/>
           <a:p>
-            <a:pPr algn="l" indent="0" marL="0">
+            <a:pPr marL="0" indent="0" algn="l">
               <a:buNone/>
             </a:pPr>
             <a:r>
@@ -4418,7 +4135,7 @@
           </a:bodyPr>
           <a:lstStyle/>
           <a:p>
-            <a:pPr algn="l" indent="0" marL="0">
+            <a:pPr marL="0" indent="0" algn="l">
               <a:buNone/>
             </a:pPr>
             <a:r>
@@ -4515,7 +4232,7 @@
           </a:bodyPr>
           <a:lstStyle/>
           <a:p>
-            <a:pPr algn="ctr" indent="0" marL="0">
+            <a:pPr marL="0" indent="0" algn="ctr">
               <a:buNone/>
             </a:pPr>
             <a:r>
@@ -4612,7 +4329,7 @@
           </a:bodyPr>
           <a:lstStyle/>
           <a:p>
-            <a:pPr algn="ctr" indent="0" marL="0">
+            <a:pPr marL="0" indent="0" algn="ctr">
               <a:buNone/>
             </a:pPr>
             <a:r>
@@ -4653,7 +4370,7 @@
           </a:bodyPr>
           <a:lstStyle/>
           <a:p>
-            <a:pPr algn="l" indent="0" marL="0">
+            <a:pPr marL="0" indent="0" algn="l">
               <a:buNone/>
             </a:pPr>
             <a:r>
@@ -4750,7 +4467,7 @@
           </a:bodyPr>
           <a:lstStyle/>
           <a:p>
-            <a:pPr algn="ctr" indent="0" marL="0">
+            <a:pPr marL="0" indent="0" algn="ctr">
               <a:buNone/>
             </a:pPr>
             <a:r>
@@ -4791,7 +4508,7 @@
           </a:bodyPr>
           <a:lstStyle/>
           <a:p>
-            <a:pPr algn="l" indent="0" marL="0">
+            <a:pPr marL="0" indent="0" algn="l">
               <a:buNone/>
             </a:pPr>
             <a:r>
@@ -4888,7 +4605,7 @@
           </a:bodyPr>
           <a:lstStyle/>
           <a:p>
-            <a:pPr algn="ctr" indent="0" marL="0">
+            <a:pPr marL="0" indent="0" algn="ctr">
               <a:buNone/>
             </a:pPr>
             <a:r>
@@ -4929,7 +4646,7 @@
           </a:bodyPr>
           <a:lstStyle/>
           <a:p>
-            <a:pPr algn="l" indent="0" marL="0">
+            <a:pPr marL="0" indent="0" algn="l">
               <a:buNone/>
             </a:pPr>
             <a:r>
@@ -5026,7 +4743,7 @@
           </a:bodyPr>
           <a:lstStyle/>
           <a:p>
-            <a:pPr algn="ctr" indent="0" marL="0">
+            <a:pPr marL="0" indent="0" algn="ctr">
               <a:buNone/>
             </a:pPr>
             <a:r>
@@ -5067,7 +4784,7 @@
           </a:bodyPr>
           <a:lstStyle/>
           <a:p>
-            <a:pPr algn="l" indent="0" marL="0">
+            <a:pPr marL="0" indent="0" algn="l">
               <a:buNone/>
             </a:pPr>
             <a:r>
@@ -5108,7 +4825,7 @@
           </a:bodyPr>
           <a:lstStyle/>
           <a:p>
-            <a:pPr algn="l" indent="0" marL="0">
+            <a:pPr marL="0" indent="0" algn="l">
               <a:buNone/>
             </a:pPr>
             <a:r>
@@ -5142,6 +4859,7 @@
         <a:solidFill>
           <a:srgbClr val="F8FAFC"/>
         </a:solidFill>
+        <a:effectLst/>
       </p:bgPr>
     </p:bg>
     <p:spTree>
@@ -5210,7 +4928,7 @@
           </a:bodyPr>
           <a:lstStyle/>
           <a:p>
-            <a:pPr algn="ctr" indent="0" marL="0">
+            <a:pPr marL="0" indent="0" algn="ctr">
               <a:buNone/>
             </a:pPr>
             <a:r>
@@ -5251,7 +4969,7 @@
           </a:bodyPr>
           <a:lstStyle/>
           <a:p>
-            <a:pPr algn="l" indent="0" marL="0">
+            <a:pPr marL="0" indent="0" algn="l">
               <a:buNone/>
             </a:pPr>
             <a:r>
@@ -5292,7 +5010,7 @@
           </a:bodyPr>
           <a:lstStyle/>
           <a:p>
-            <a:pPr algn="l" indent="0" marL="0">
+            <a:pPr marL="0" indent="0" algn="l">
               <a:buNone/>
             </a:pPr>
             <a:r>
@@ -5389,7 +5107,7 @@
           </a:bodyPr>
           <a:lstStyle/>
           <a:p>
-            <a:pPr algn="ctr" indent="0" marL="0">
+            <a:pPr marL="0" indent="0" algn="ctr">
               <a:buNone/>
             </a:pPr>
             <a:r>
@@ -5433,7 +5151,7 @@
             <a:prstDash val="solid"/>
           </a:ln>
           <a:effectLst>
-            <a:outerShdw sx="100000" sy="100000" kx="0" ky="0" algn="bl" rotWithShape="0" blurRad="12700" dist="50800" dir="2700000">
+            <a:outerShdw blurRad="12700" dist="50800" dir="2700000" algn="bl" rotWithShape="0">
               <a:srgbClr val="000000">
                 <a:alpha val="10000"/>
               </a:srgbClr>
@@ -5491,7 +5209,7 @@
           </a:bodyPr>
           <a:lstStyle/>
           <a:p>
-            <a:pPr algn="l" indent="0" marL="0">
+            <a:pPr marL="0" indent="0" algn="l">
               <a:buNone/>
             </a:pPr>
             <a:r>
@@ -5532,7 +5250,7 @@
           </a:bodyPr>
           <a:lstStyle/>
           <a:p>
-            <a:pPr algn="l" indent="0" marL="0">
+            <a:pPr marL="0" indent="0" algn="l">
               <a:buNone/>
             </a:pPr>
             <a:r>
@@ -5549,7 +5267,7 @@
             <a:endParaRPr lang="en-US" sz="1010" dirty="0"/>
           </a:p>
           <a:p>
-            <a:pPr algn="l" indent="0" marL="0">
+            <a:pPr marL="0" indent="0" algn="l">
               <a:buNone/>
             </a:pPr>
             <a:r>
@@ -5566,7 +5284,7 @@
             <a:endParaRPr lang="en-US" sz="1010" dirty="0"/>
           </a:p>
           <a:p>
-            <a:pPr algn="l" indent="0" marL="0">
+            <a:pPr marL="0" indent="0" algn="l">
               <a:buNone/>
             </a:pPr>
             <a:r>
@@ -5610,7 +5328,7 @@
             <a:prstDash val="solid"/>
           </a:ln>
           <a:effectLst>
-            <a:outerShdw sx="100000" sy="100000" kx="0" ky="0" algn="bl" rotWithShape="0" blurRad="12700" dist="50800" dir="2700000">
+            <a:outerShdw blurRad="12700" dist="50800" dir="2700000" algn="bl" rotWithShape="0">
               <a:srgbClr val="000000">
                 <a:alpha val="10000"/>
               </a:srgbClr>
@@ -5668,7 +5386,7 @@
           </a:bodyPr>
           <a:lstStyle/>
           <a:p>
-            <a:pPr algn="l" indent="0" marL="0">
+            <a:pPr marL="0" indent="0" algn="l">
               <a:buNone/>
             </a:pPr>
             <a:r>
@@ -5709,7 +5427,7 @@
           </a:bodyPr>
           <a:lstStyle/>
           <a:p>
-            <a:pPr algn="l" indent="0" marL="0">
+            <a:pPr marL="0" indent="0" algn="l">
               <a:buNone/>
             </a:pPr>
             <a:r>
@@ -5726,7 +5444,7 @@
             <a:endParaRPr lang="en-US" sz="1010" dirty="0"/>
           </a:p>
           <a:p>
-            <a:pPr algn="l" indent="0" marL="0">
+            <a:pPr marL="0" indent="0" algn="l">
               <a:buNone/>
             </a:pPr>
             <a:r>
@@ -5743,7 +5461,7 @@
             <a:endParaRPr lang="en-US" sz="1010" dirty="0"/>
           </a:p>
           <a:p>
-            <a:pPr algn="l" indent="0" marL="0">
+            <a:pPr marL="0" indent="0" algn="l">
               <a:buNone/>
             </a:pPr>
             <a:r>
@@ -5787,7 +5505,7 @@
             <a:prstDash val="solid"/>
           </a:ln>
           <a:effectLst>
-            <a:outerShdw sx="100000" sy="100000" kx="0" ky="0" algn="bl" rotWithShape="0" blurRad="12700" dist="50800" dir="2700000">
+            <a:outerShdw blurRad="12700" dist="50800" dir="2700000" algn="bl" rotWithShape="0">
               <a:srgbClr val="000000">
                 <a:alpha val="10000"/>
               </a:srgbClr>
@@ -5845,7 +5563,7 @@
           </a:bodyPr>
           <a:lstStyle/>
           <a:p>
-            <a:pPr algn="l" indent="0" marL="0">
+            <a:pPr marL="0" indent="0" algn="l">
               <a:buNone/>
             </a:pPr>
             <a:r>
@@ -5886,7 +5604,7 @@
           </a:bodyPr>
           <a:lstStyle/>
           <a:p>
-            <a:pPr algn="l" indent="0" marL="0">
+            <a:pPr marL="0" indent="0" algn="l">
               <a:buNone/>
             </a:pPr>
             <a:r>
@@ -5903,7 +5621,7 @@
             <a:endParaRPr lang="en-US" sz="1010" dirty="0"/>
           </a:p>
           <a:p>
-            <a:pPr algn="l" indent="0" marL="0">
+            <a:pPr marL="0" indent="0" algn="l">
               <a:buNone/>
             </a:pPr>
             <a:r>
@@ -5920,7 +5638,7 @@
             <a:endParaRPr lang="en-US" sz="1010" dirty="0"/>
           </a:p>
           <a:p>
-            <a:pPr algn="l" indent="0" marL="0">
+            <a:pPr marL="0" indent="0" algn="l">
               <a:buNone/>
             </a:pPr>
             <a:r>
@@ -5964,7 +5682,7 @@
             <a:prstDash val="solid"/>
           </a:ln>
           <a:effectLst>
-            <a:outerShdw sx="100000" sy="100000" kx="0" ky="0" algn="bl" rotWithShape="0" blurRad="12700" dist="50800" dir="2700000">
+            <a:outerShdw blurRad="12700" dist="50800" dir="2700000" algn="bl" rotWithShape="0">
               <a:srgbClr val="000000">
                 <a:alpha val="10000"/>
               </a:srgbClr>
@@ -6022,7 +5740,7 @@
           </a:bodyPr>
           <a:lstStyle/>
           <a:p>
-            <a:pPr algn="l" indent="0" marL="0">
+            <a:pPr marL="0" indent="0" algn="l">
               <a:buNone/>
             </a:pPr>
             <a:r>
@@ -6063,7 +5781,7 @@
           </a:bodyPr>
           <a:lstStyle/>
           <a:p>
-            <a:pPr algn="l" indent="0" marL="0">
+            <a:pPr marL="0" indent="0" algn="l">
               <a:buNone/>
             </a:pPr>
             <a:r>
@@ -6080,7 +5798,7 @@
             <a:endParaRPr lang="en-US" sz="1010" dirty="0"/>
           </a:p>
           <a:p>
-            <a:pPr algn="l" indent="0" marL="0">
+            <a:pPr marL="0" indent="0" algn="l">
               <a:buNone/>
             </a:pPr>
             <a:r>
@@ -6097,7 +5815,7 @@
             <a:endParaRPr lang="en-US" sz="1010" dirty="0"/>
           </a:p>
           <a:p>
-            <a:pPr algn="l" indent="0" marL="0">
+            <a:pPr marL="0" indent="0" algn="l">
               <a:buNone/>
             </a:pPr>
             <a:r>
@@ -6138,7 +5856,7 @@
           </a:bodyPr>
           <a:lstStyle/>
           <a:p>
-            <a:pPr algn="ctr" indent="0" marL="0">
+            <a:pPr marL="0" indent="0" algn="ctr">
               <a:buNone/>
             </a:pPr>
             <a:r>
@@ -6172,6 +5890,7 @@
         <a:solidFill>
           <a:srgbClr val="F8FAFC"/>
         </a:solidFill>
+        <a:effectLst/>
       </p:bgPr>
     </p:bg>
     <p:spTree>
@@ -6240,7 +5959,7 @@
           </a:bodyPr>
           <a:lstStyle/>
           <a:p>
-            <a:pPr algn="ctr" indent="0" marL="0">
+            <a:pPr marL="0" indent="0" algn="ctr">
               <a:buNone/>
             </a:pPr>
             <a:r>
@@ -6281,7 +6000,7 @@
           </a:bodyPr>
           <a:lstStyle/>
           <a:p>
-            <a:pPr algn="l" indent="0" marL="0">
+            <a:pPr marL="0" indent="0" algn="l">
               <a:buNone/>
             </a:pPr>
             <a:r>
@@ -6322,7 +6041,7 @@
           </a:bodyPr>
           <a:lstStyle/>
           <a:p>
-            <a:pPr algn="l" indent="0" marL="0">
+            <a:pPr marL="0" indent="0" algn="l">
               <a:buNone/>
             </a:pPr>
             <a:r>
@@ -6419,7 +6138,7 @@
           </a:bodyPr>
           <a:lstStyle/>
           <a:p>
-            <a:pPr algn="ctr" indent="0" marL="0">
+            <a:pPr marL="0" indent="0" algn="ctr">
               <a:buNone/>
             </a:pPr>
             <a:r>
@@ -6516,7 +6235,7 @@
           </a:bodyPr>
           <a:lstStyle/>
           <a:p>
-            <a:pPr algn="ctr" indent="0" marL="0">
+            <a:pPr marL="0" indent="0" algn="ctr">
               <a:buNone/>
             </a:pPr>
             <a:r>
@@ -6557,7 +6276,7 @@
           </a:bodyPr>
           <a:lstStyle/>
           <a:p>
-            <a:pPr algn="l" indent="0" marL="0">
+            <a:pPr marL="0" indent="0" algn="l">
               <a:buNone/>
             </a:pPr>
             <a:r>
@@ -6598,7 +6317,7 @@
           </a:bodyPr>
           <a:lstStyle/>
           <a:p>
-            <a:pPr algn="l" indent="0" marL="0">
+            <a:pPr marL="0" indent="0" algn="l">
               <a:buNone/>
             </a:pPr>
             <a:r>
@@ -6695,7 +6414,7 @@
           </a:bodyPr>
           <a:lstStyle/>
           <a:p>
-            <a:pPr algn="ctr" indent="0" marL="0">
+            <a:pPr marL="0" indent="0" algn="ctr">
               <a:buNone/>
             </a:pPr>
             <a:r>
@@ -6736,7 +6455,7 @@
           </a:bodyPr>
           <a:lstStyle/>
           <a:p>
-            <a:pPr algn="l" indent="0" marL="0">
+            <a:pPr marL="0" indent="0" algn="l">
               <a:buNone/>
             </a:pPr>
             <a:r>
@@ -6777,7 +6496,7 @@
           </a:bodyPr>
           <a:lstStyle/>
           <a:p>
-            <a:pPr algn="l" indent="0" marL="0">
+            <a:pPr marL="0" indent="0" algn="l">
               <a:buNone/>
             </a:pPr>
             <a:r>
@@ -6874,7 +6593,7 @@
           </a:bodyPr>
           <a:lstStyle/>
           <a:p>
-            <a:pPr algn="ctr" indent="0" marL="0">
+            <a:pPr marL="0" indent="0" algn="ctr">
               <a:buNone/>
             </a:pPr>
             <a:r>
@@ -6915,7 +6634,7 @@
           </a:bodyPr>
           <a:lstStyle/>
           <a:p>
-            <a:pPr algn="l" indent="0" marL="0">
+            <a:pPr marL="0" indent="0" algn="l">
               <a:buNone/>
             </a:pPr>
             <a:r>
@@ -6956,7 +6675,7 @@
           </a:bodyPr>
           <a:lstStyle/>
           <a:p>
-            <a:pPr algn="l" indent="0" marL="0">
+            <a:pPr marL="0" indent="0" algn="l">
               <a:buNone/>
             </a:pPr>
             <a:r>
@@ -7053,7 +6772,7 @@
           </a:bodyPr>
           <a:lstStyle/>
           <a:p>
-            <a:pPr algn="ctr" indent="0" marL="0">
+            <a:pPr marL="0" indent="0" algn="ctr">
               <a:buNone/>
             </a:pPr>
             <a:r>
@@ -7094,7 +6813,7 @@
           </a:bodyPr>
           <a:lstStyle/>
           <a:p>
-            <a:pPr algn="l" indent="0" marL="0">
+            <a:pPr marL="0" indent="0" algn="l">
               <a:buNone/>
             </a:pPr>
             <a:r>
@@ -7135,7 +6854,7 @@
           </a:bodyPr>
           <a:lstStyle/>
           <a:p>
-            <a:pPr algn="l" indent="0" marL="0">
+            <a:pPr marL="0" indent="0" algn="l">
               <a:buNone/>
             </a:pPr>
             <a:r>
@@ -7232,7 +6951,7 @@
           </a:bodyPr>
           <a:lstStyle/>
           <a:p>
-            <a:pPr algn="ctr" indent="0" marL="0">
+            <a:pPr marL="0" indent="0" algn="ctr">
               <a:buNone/>
             </a:pPr>
             <a:r>
@@ -7273,7 +6992,7 @@
           </a:bodyPr>
           <a:lstStyle/>
           <a:p>
-            <a:pPr algn="l" indent="0" marL="0">
+            <a:pPr marL="0" indent="0" algn="l">
               <a:buNone/>
             </a:pPr>
             <a:r>
@@ -7314,7 +7033,7 @@
           </a:bodyPr>
           <a:lstStyle/>
           <a:p>
-            <a:pPr algn="l" indent="0" marL="0">
+            <a:pPr marL="0" indent="0" algn="l">
               <a:buNone/>
             </a:pPr>
             <a:r>
@@ -7355,7 +7074,7 @@
           </a:bodyPr>
           <a:lstStyle/>
           <a:p>
-            <a:pPr algn="l" indent="0" marL="0">
+            <a:pPr marL="0" indent="0" algn="l">
               <a:buNone/>
             </a:pPr>
             <a:r>
@@ -7389,6 +7108,7 @@
         <a:solidFill>
           <a:srgbClr val="F8FAFC"/>
         </a:solidFill>
+        <a:effectLst/>
       </p:bgPr>
     </p:bg>
     <p:spTree>
@@ -7457,7 +7177,7 @@
           </a:bodyPr>
           <a:lstStyle/>
           <a:p>
-            <a:pPr algn="ctr" indent="0" marL="0">
+            <a:pPr marL="0" indent="0" algn="ctr">
               <a:buNone/>
             </a:pPr>
             <a:r>
@@ -7498,7 +7218,7 @@
           </a:bodyPr>
           <a:lstStyle/>
           <a:p>
-            <a:pPr algn="l" indent="0" marL="0">
+            <a:pPr marL="0" indent="0" algn="l">
               <a:buNone/>
             </a:pPr>
             <a:r>
@@ -7539,7 +7259,7 @@
           </a:bodyPr>
           <a:lstStyle/>
           <a:p>
-            <a:pPr algn="l" indent="0" marL="0">
+            <a:pPr marL="0" indent="0" algn="l">
               <a:buNone/>
             </a:pPr>
             <a:r>
@@ -7636,7 +7356,7 @@
           </a:bodyPr>
           <a:lstStyle/>
           <a:p>
-            <a:pPr algn="ctr" indent="0" marL="0">
+            <a:pPr marL="0" indent="0" algn="ctr">
               <a:buNone/>
             </a:pPr>
             <a:r>
@@ -7680,7 +7400,7 @@
             <a:prstDash val="solid"/>
           </a:ln>
           <a:effectLst>
-            <a:outerShdw sx="100000" sy="100000" kx="0" ky="0" algn="bl" rotWithShape="0" blurRad="12700" dist="50800" dir="2700000">
+            <a:outerShdw blurRad="12700" dist="50800" dir="2700000" algn="bl" rotWithShape="0">
               <a:srgbClr val="000000">
                 <a:alpha val="10000"/>
               </a:srgbClr>
@@ -7711,7 +7431,7 @@
           </a:bodyPr>
           <a:lstStyle/>
           <a:p>
-            <a:pPr algn="ctr" indent="0" marL="0">
+            <a:pPr marL="0" indent="0" algn="ctr">
               <a:buNone/>
             </a:pPr>
             <a:r>
@@ -7752,7 +7472,7 @@
           </a:bodyPr>
           <a:lstStyle/>
           <a:p>
-            <a:pPr algn="ctr" indent="0" marL="0">
+            <a:pPr marL="0" indent="0" algn="ctr">
               <a:buNone/>
             </a:pPr>
             <a:r>
@@ -7793,7 +7513,7 @@
           </a:bodyPr>
           <a:lstStyle/>
           <a:p>
-            <a:pPr algn="ctr" indent="0" marL="0">
+            <a:pPr marL="0" indent="0" algn="ctr">
               <a:buNone/>
             </a:pPr>
             <a:r>
@@ -7837,7 +7557,7 @@
             <a:prstDash val="solid"/>
           </a:ln>
           <a:effectLst>
-            <a:outerShdw sx="100000" sy="100000" kx="0" ky="0" algn="bl" rotWithShape="0" blurRad="12700" dist="50800" dir="2700000">
+            <a:outerShdw blurRad="12700" dist="50800" dir="2700000" algn="bl" rotWithShape="0">
               <a:srgbClr val="000000">
                 <a:alpha val="10000"/>
               </a:srgbClr>
@@ -7868,7 +7588,7 @@
           </a:bodyPr>
           <a:lstStyle/>
           <a:p>
-            <a:pPr algn="ctr" indent="0" marL="0">
+            <a:pPr marL="0" indent="0" algn="ctr">
               <a:buNone/>
             </a:pPr>
             <a:r>
@@ -7909,7 +7629,7 @@
           </a:bodyPr>
           <a:lstStyle/>
           <a:p>
-            <a:pPr algn="ctr" indent="0" marL="0">
+            <a:pPr marL="0" indent="0" algn="ctr">
               <a:buNone/>
             </a:pPr>
             <a:r>
@@ -7950,7 +7670,7 @@
           </a:bodyPr>
           <a:lstStyle/>
           <a:p>
-            <a:pPr algn="ctr" indent="0" marL="0">
+            <a:pPr marL="0" indent="0" algn="ctr">
               <a:buNone/>
             </a:pPr>
             <a:r>
@@ -7994,7 +7714,7 @@
             <a:prstDash val="solid"/>
           </a:ln>
           <a:effectLst>
-            <a:outerShdw sx="100000" sy="100000" kx="0" ky="0" algn="bl" rotWithShape="0" blurRad="12700" dist="50800" dir="2700000">
+            <a:outerShdw blurRad="12700" dist="50800" dir="2700000" algn="bl" rotWithShape="0">
               <a:srgbClr val="000000">
                 <a:alpha val="10000"/>
               </a:srgbClr>
@@ -8025,7 +7745,7 @@
           </a:bodyPr>
           <a:lstStyle/>
           <a:p>
-            <a:pPr algn="ctr" indent="0" marL="0">
+            <a:pPr marL="0" indent="0" algn="ctr">
               <a:buNone/>
             </a:pPr>
             <a:r>
@@ -8066,7 +7786,7 @@
           </a:bodyPr>
           <a:lstStyle/>
           <a:p>
-            <a:pPr algn="ctr" indent="0" marL="0">
+            <a:pPr marL="0" indent="0" algn="ctr">
               <a:buNone/>
             </a:pPr>
             <a:r>
@@ -8107,7 +7827,7 @@
           </a:bodyPr>
           <a:lstStyle/>
           <a:p>
-            <a:pPr algn="ctr" indent="0" marL="0">
+            <a:pPr marL="0" indent="0" algn="ctr">
               <a:buNone/>
             </a:pPr>
             <a:r>
@@ -8175,7 +7895,7 @@
           </a:bodyPr>
           <a:lstStyle/>
           <a:p>
-            <a:pPr algn="ctr" indent="0" marL="0">
+            <a:pPr marL="0" indent="0" algn="ctr">
               <a:buNone/>
             </a:pPr>
             <a:r>
@@ -8209,6 +7929,7 @@
         <a:solidFill>
           <a:srgbClr val="F8FAFC"/>
         </a:solidFill>
+        <a:effectLst/>
       </p:bgPr>
     </p:bg>
     <p:spTree>
@@ -8277,7 +7998,7 @@
           </a:bodyPr>
           <a:lstStyle/>
           <a:p>
-            <a:pPr algn="ctr" indent="0" marL="0">
+            <a:pPr marL="0" indent="0" algn="ctr">
               <a:buNone/>
             </a:pPr>
             <a:r>
@@ -8318,7 +8039,7 @@
           </a:bodyPr>
           <a:lstStyle/>
           <a:p>
-            <a:pPr algn="l" indent="0" marL="0">
+            <a:pPr marL="0" indent="0" algn="l">
               <a:buNone/>
             </a:pPr>
             <a:r>
@@ -8359,7 +8080,7 @@
           </a:bodyPr>
           <a:lstStyle/>
           <a:p>
-            <a:pPr algn="l" indent="0" marL="0">
+            <a:pPr marL="0" indent="0" algn="l">
               <a:buNone/>
             </a:pPr>
             <a:r>
@@ -8456,7 +8177,7 @@
           </a:bodyPr>
           <a:lstStyle/>
           <a:p>
-            <a:pPr algn="ctr" indent="0" marL="0">
+            <a:pPr marL="0" indent="0" algn="ctr">
               <a:buNone/>
             </a:pPr>
             <a:r>
@@ -8500,7 +8221,7 @@
             <a:prstDash val="solid"/>
           </a:ln>
           <a:effectLst>
-            <a:outerShdw sx="100000" sy="100000" kx="0" ky="0" algn="bl" rotWithShape="0" blurRad="12700" dist="50800" dir="2700000">
+            <a:outerShdw blurRad="12700" dist="50800" dir="2700000" algn="bl" rotWithShape="0">
               <a:srgbClr val="000000">
                 <a:alpha val="10000"/>
               </a:srgbClr>
@@ -8531,7 +8252,7 @@
           </a:bodyPr>
           <a:lstStyle/>
           <a:p>
-            <a:pPr algn="ctr" indent="0" marL="0">
+            <a:pPr marL="0" indent="0" algn="ctr">
               <a:buNone/>
             </a:pPr>
             <a:r>
@@ -8572,7 +8293,7 @@
           </a:bodyPr>
           <a:lstStyle/>
           <a:p>
-            <a:pPr algn="ctr" indent="0" marL="0">
+            <a:pPr marL="0" indent="0" algn="ctr">
               <a:buNone/>
             </a:pPr>
             <a:r>
@@ -8613,7 +8334,7 @@
           </a:bodyPr>
           <a:lstStyle/>
           <a:p>
-            <a:pPr algn="ctr" indent="0" marL="0">
+            <a:pPr marL="0" indent="0" algn="ctr">
               <a:buNone/>
             </a:pPr>
             <a:r>
@@ -8682,7 +8403,7 @@
             <a:prstDash val="solid"/>
           </a:ln>
           <a:effectLst>
-            <a:outerShdw sx="100000" sy="100000" kx="0" ky="0" algn="bl" rotWithShape="0" blurRad="12700" dist="50800" dir="2700000">
+            <a:outerShdw blurRad="12700" dist="50800" dir="2700000" algn="bl" rotWithShape="0">
               <a:srgbClr val="000000">
                 <a:alpha val="10000"/>
               </a:srgbClr>
@@ -8713,7 +8434,7 @@
           </a:bodyPr>
           <a:lstStyle/>
           <a:p>
-            <a:pPr algn="ctr" indent="0" marL="0">
+            <a:pPr marL="0" indent="0" algn="ctr">
               <a:buNone/>
             </a:pPr>
             <a:r>
@@ -8754,7 +8475,7 @@
           </a:bodyPr>
           <a:lstStyle/>
           <a:p>
-            <a:pPr algn="ctr" indent="0" marL="0">
+            <a:pPr marL="0" indent="0" algn="ctr">
               <a:buNone/>
             </a:pPr>
             <a:r>
@@ -8795,7 +8516,7 @@
           </a:bodyPr>
           <a:lstStyle/>
           <a:p>
-            <a:pPr algn="ctr" indent="0" marL="0">
+            <a:pPr marL="0" indent="0" algn="ctr">
               <a:buNone/>
             </a:pPr>
             <a:r>
@@ -8864,7 +8585,7 @@
             <a:prstDash val="solid"/>
           </a:ln>
           <a:effectLst>
-            <a:outerShdw sx="100000" sy="100000" kx="0" ky="0" algn="bl" rotWithShape="0" blurRad="12700" dist="50800" dir="2700000">
+            <a:outerShdw blurRad="12700" dist="50800" dir="2700000" algn="bl" rotWithShape="0">
               <a:srgbClr val="000000">
                 <a:alpha val="10000"/>
               </a:srgbClr>
@@ -8895,7 +8616,7 @@
           </a:bodyPr>
           <a:lstStyle/>
           <a:p>
-            <a:pPr algn="ctr" indent="0" marL="0">
+            <a:pPr marL="0" indent="0" algn="ctr">
               <a:buNone/>
             </a:pPr>
             <a:r>
@@ -8936,7 +8657,7 @@
           </a:bodyPr>
           <a:lstStyle/>
           <a:p>
-            <a:pPr algn="ctr" indent="0" marL="0">
+            <a:pPr marL="0" indent="0" algn="ctr">
               <a:buNone/>
             </a:pPr>
             <a:r>
@@ -8977,7 +8698,7 @@
           </a:bodyPr>
           <a:lstStyle/>
           <a:p>
-            <a:pPr algn="ctr" indent="0" marL="0">
+            <a:pPr marL="0" indent="0" algn="ctr">
               <a:buNone/>
             </a:pPr>
             <a:r>
@@ -9046,7 +8767,7 @@
             <a:prstDash val="solid"/>
           </a:ln>
           <a:effectLst>
-            <a:outerShdw sx="100000" sy="100000" kx="0" ky="0" algn="bl" rotWithShape="0" blurRad="12700" dist="50800" dir="2700000">
+            <a:outerShdw blurRad="12700" dist="50800" dir="2700000" algn="bl" rotWithShape="0">
               <a:srgbClr val="000000">
                 <a:alpha val="10000"/>
               </a:srgbClr>
@@ -9077,7 +8798,7 @@
           </a:bodyPr>
           <a:lstStyle/>
           <a:p>
-            <a:pPr algn="ctr" indent="0" marL="0">
+            <a:pPr marL="0" indent="0" algn="ctr">
               <a:buNone/>
             </a:pPr>
             <a:r>
@@ -9118,7 +8839,7 @@
           </a:bodyPr>
           <a:lstStyle/>
           <a:p>
-            <a:pPr algn="ctr" indent="0" marL="0">
+            <a:pPr marL="0" indent="0" algn="ctr">
               <a:buNone/>
             </a:pPr>
             <a:r>
@@ -9159,7 +8880,7 @@
           </a:bodyPr>
           <a:lstStyle/>
           <a:p>
-            <a:pPr algn="ctr" indent="0" marL="0">
+            <a:pPr marL="0" indent="0" algn="ctr">
               <a:buNone/>
             </a:pPr>
             <a:r>
@@ -9228,7 +8949,7 @@
             <a:prstDash val="solid"/>
           </a:ln>
           <a:effectLst>
-            <a:outerShdw sx="100000" sy="100000" kx="0" ky="0" algn="bl" rotWithShape="0" blurRad="12700" dist="50800" dir="2700000">
+            <a:outerShdw blurRad="12700" dist="50800" dir="2700000" algn="bl" rotWithShape="0">
               <a:srgbClr val="000000">
                 <a:alpha val="10000"/>
               </a:srgbClr>
@@ -9259,7 +8980,7 @@
           </a:bodyPr>
           <a:lstStyle/>
           <a:p>
-            <a:pPr algn="ctr" indent="0" marL="0">
+            <a:pPr marL="0" indent="0" algn="ctr">
               <a:buNone/>
             </a:pPr>
             <a:r>
@@ -9300,7 +9021,7 @@
           </a:bodyPr>
           <a:lstStyle/>
           <a:p>
-            <a:pPr algn="ctr" indent="0" marL="0">
+            <a:pPr marL="0" indent="0" algn="ctr">
               <a:buNone/>
             </a:pPr>
             <a:r>
@@ -9341,7 +9062,7 @@
           </a:bodyPr>
           <a:lstStyle/>
           <a:p>
-            <a:pPr algn="ctr" indent="0" marL="0">
+            <a:pPr marL="0" indent="0" algn="ctr">
               <a:buNone/>
             </a:pPr>
             <a:r>
@@ -9375,6 +9096,7 @@
         <a:solidFill>
           <a:srgbClr val="F8FAFC"/>
         </a:solidFill>
+        <a:effectLst/>
       </p:bgPr>
     </p:bg>
     <p:spTree>
@@ -9443,7 +9165,7 @@
           </a:bodyPr>
           <a:lstStyle/>
           <a:p>
-            <a:pPr algn="ctr" indent="0" marL="0">
+            <a:pPr marL="0" indent="0" algn="ctr">
               <a:buNone/>
             </a:pPr>
             <a:r>
@@ -9484,7 +9206,7 @@
           </a:bodyPr>
           <a:lstStyle/>
           <a:p>
-            <a:pPr algn="l" indent="0" marL="0">
+            <a:pPr marL="0" indent="0" algn="l">
               <a:buNone/>
             </a:pPr>
             <a:r>
@@ -9525,7 +9247,7 @@
           </a:bodyPr>
           <a:lstStyle/>
           <a:p>
-            <a:pPr algn="l" indent="0" marL="0">
+            <a:pPr marL="0" indent="0" algn="l">
               <a:buNone/>
             </a:pPr>
             <a:r>
@@ -9622,7 +9344,7 @@
           </a:bodyPr>
           <a:lstStyle/>
           <a:p>
-            <a:pPr algn="ctr" indent="0" marL="0">
+            <a:pPr marL="0" indent="0" algn="ctr">
               <a:buNone/>
             </a:pPr>
             <a:r>
@@ -9666,7 +9388,7 @@
             <a:prstDash val="solid"/>
           </a:ln>
           <a:effectLst>
-            <a:outerShdw sx="100000" sy="100000" kx="0" ky="0" algn="bl" rotWithShape="0" blurRad="12700" dist="50800" dir="2700000">
+            <a:outerShdw blurRad="12700" dist="50800" dir="2700000" algn="bl" rotWithShape="0">
               <a:srgbClr val="000000">
                 <a:alpha val="10000"/>
               </a:srgbClr>
@@ -9724,7 +9446,7 @@
           </a:bodyPr>
           <a:lstStyle/>
           <a:p>
-            <a:pPr algn="l" indent="0" marL="0">
+            <a:pPr marL="0" indent="0" algn="l">
               <a:buNone/>
             </a:pPr>
             <a:r>
@@ -9765,7 +9487,7 @@
           </a:bodyPr>
           <a:lstStyle/>
           <a:p>
-            <a:pPr algn="l" indent="0" marL="0">
+            <a:pPr marL="0" indent="0" algn="l">
               <a:buNone/>
             </a:pPr>
             <a:r>
@@ -9809,7 +9531,7 @@
             <a:prstDash val="solid"/>
           </a:ln>
           <a:effectLst>
-            <a:outerShdw sx="100000" sy="100000" kx="0" ky="0" algn="bl" rotWithShape="0" blurRad="12700" dist="50800" dir="2700000">
+            <a:outerShdw blurRad="12700" dist="50800" dir="2700000" algn="bl" rotWithShape="0">
               <a:srgbClr val="000000">
                 <a:alpha val="10000"/>
               </a:srgbClr>
@@ -9867,7 +9589,7 @@
           </a:bodyPr>
           <a:lstStyle/>
           <a:p>
-            <a:pPr algn="l" indent="0" marL="0">
+            <a:pPr marL="0" indent="0" algn="l">
               <a:buNone/>
             </a:pPr>
             <a:r>
@@ -9908,7 +9630,7 @@
           </a:bodyPr>
           <a:lstStyle/>
           <a:p>
-            <a:pPr algn="l" indent="0" marL="0">
+            <a:pPr marL="0" indent="0" algn="l">
               <a:buNone/>
             </a:pPr>
             <a:r>
@@ -9952,7 +9674,7 @@
             <a:prstDash val="solid"/>
           </a:ln>
           <a:effectLst>
-            <a:outerShdw sx="100000" sy="100000" kx="0" ky="0" algn="bl" rotWithShape="0" blurRad="12700" dist="50800" dir="2700000">
+            <a:outerShdw blurRad="12700" dist="50800" dir="2700000" algn="bl" rotWithShape="0">
               <a:srgbClr val="000000">
                 <a:alpha val="10000"/>
               </a:srgbClr>
@@ -10010,7 +9732,7 @@
           </a:bodyPr>
           <a:lstStyle/>
           <a:p>
-            <a:pPr algn="l" indent="0" marL="0">
+            <a:pPr marL="0" indent="0" algn="l">
               <a:buNone/>
             </a:pPr>
             <a:r>
@@ -10051,7 +9773,7 @@
           </a:bodyPr>
           <a:lstStyle/>
           <a:p>
-            <a:pPr algn="l" indent="0" marL="0">
+            <a:pPr marL="0" indent="0" algn="l">
               <a:buNone/>
             </a:pPr>
             <a:r>
@@ -10095,7 +9817,7 @@
             <a:prstDash val="solid"/>
           </a:ln>
           <a:effectLst>
-            <a:outerShdw sx="100000" sy="100000" kx="0" ky="0" algn="bl" rotWithShape="0" blurRad="12700" dist="50800" dir="2700000">
+            <a:outerShdw blurRad="12700" dist="50800" dir="2700000" algn="bl" rotWithShape="0">
               <a:srgbClr val="000000">
                 <a:alpha val="10000"/>
               </a:srgbClr>
@@ -10153,7 +9875,7 @@
           </a:bodyPr>
           <a:lstStyle/>
           <a:p>
-            <a:pPr algn="l" indent="0" marL="0">
+            <a:pPr marL="0" indent="0" algn="l">
               <a:buNone/>
             </a:pPr>
             <a:r>
@@ -10194,7 +9916,7 @@
           </a:bodyPr>
           <a:lstStyle/>
           <a:p>
-            <a:pPr algn="l" indent="0" marL="0">
+            <a:pPr marL="0" indent="0" algn="l">
               <a:buNone/>
             </a:pPr>
             <a:r>
@@ -10238,7 +9960,7 @@
             <a:prstDash val="solid"/>
           </a:ln>
           <a:effectLst>
-            <a:outerShdw sx="100000" sy="100000" kx="0" ky="0" algn="bl" rotWithShape="0" blurRad="12700" dist="50800" dir="2700000">
+            <a:outerShdw blurRad="12700" dist="50800" dir="2700000" algn="bl" rotWithShape="0">
               <a:srgbClr val="000000">
                 <a:alpha val="10000"/>
               </a:srgbClr>
@@ -10296,7 +10018,7 @@
           </a:bodyPr>
           <a:lstStyle/>
           <a:p>
-            <a:pPr algn="l" indent="0" marL="0">
+            <a:pPr marL="0" indent="0" algn="l">
               <a:buNone/>
             </a:pPr>
             <a:r>
@@ -10337,7 +10059,7 @@
           </a:bodyPr>
           <a:lstStyle/>
           <a:p>
-            <a:pPr algn="l" indent="0" marL="0">
+            <a:pPr marL="0" indent="0" algn="l">
               <a:buNone/>
             </a:pPr>
             <a:r>
@@ -10381,7 +10103,7 @@
             <a:prstDash val="solid"/>
           </a:ln>
           <a:effectLst>
-            <a:outerShdw sx="100000" sy="100000" kx="0" ky="0" algn="bl" rotWithShape="0" blurRad="12700" dist="50800" dir="2700000">
+            <a:outerShdw blurRad="12700" dist="50800" dir="2700000" algn="bl" rotWithShape="0">
               <a:srgbClr val="000000">
                 <a:alpha val="10000"/>
               </a:srgbClr>
@@ -10439,7 +10161,7 @@
           </a:bodyPr>
           <a:lstStyle/>
           <a:p>
-            <a:pPr algn="l" indent="0" marL="0">
+            <a:pPr marL="0" indent="0" algn="l">
               <a:buNone/>
             </a:pPr>
             <a:r>
@@ -10480,7 +10202,7 @@
           </a:bodyPr>
           <a:lstStyle/>
           <a:p>
-            <a:pPr algn="l" indent="0" marL="0">
+            <a:pPr marL="0" indent="0" algn="l">
               <a:buNone/>
             </a:pPr>
             <a:r>
@@ -10548,7 +10270,7 @@
           </a:bodyPr>
           <a:lstStyle/>
           <a:p>
-            <a:pPr algn="ctr" indent="0" marL="0">
+            <a:pPr marL="0" indent="0" algn="ctr">
               <a:buNone/>
             </a:pPr>
             <a:r>
@@ -10582,6 +10304,7 @@
         <a:solidFill>
           <a:srgbClr val="F8FAFC"/>
         </a:solidFill>
+        <a:effectLst/>
       </p:bgPr>
     </p:bg>
     <p:spTree>
@@ -10650,7 +10373,7 @@
           </a:bodyPr>
           <a:lstStyle/>
           <a:p>
-            <a:pPr algn="ctr" indent="0" marL="0">
+            <a:pPr marL="0" indent="0" algn="ctr">
               <a:buNone/>
             </a:pPr>
             <a:r>
@@ -10691,7 +10414,7 @@
           </a:bodyPr>
           <a:lstStyle/>
           <a:p>
-            <a:pPr algn="l" indent="0" marL="0">
+            <a:pPr marL="0" indent="0" algn="l">
               <a:buNone/>
             </a:pPr>
             <a:r>
@@ -10732,7 +10455,7 @@
           </a:bodyPr>
           <a:lstStyle/>
           <a:p>
-            <a:pPr algn="l" indent="0" marL="0">
+            <a:pPr marL="0" indent="0" algn="l">
               <a:buNone/>
             </a:pPr>
             <a:r>
@@ -10829,7 +10552,7 @@
           </a:bodyPr>
           <a:lstStyle/>
           <a:p>
-            <a:pPr algn="ctr" indent="0" marL="0">
+            <a:pPr marL="0" indent="0" algn="ctr">
               <a:buNone/>
             </a:pPr>
             <a:r>
@@ -10873,7 +10596,7 @@
             <a:prstDash val="solid"/>
           </a:ln>
           <a:effectLst>
-            <a:outerShdw sx="100000" sy="100000" kx="0" ky="0" algn="bl" rotWithShape="0" blurRad="12700" dist="50800" dir="2700000">
+            <a:outerShdw blurRad="12700" dist="50800" dir="2700000" algn="bl" rotWithShape="0">
               <a:srgbClr val="000000">
                 <a:alpha val="10000"/>
               </a:srgbClr>
@@ -10931,7 +10654,7 @@
           </a:bodyPr>
           <a:lstStyle/>
           <a:p>
-            <a:pPr algn="l" indent="0" marL="0">
+            <a:pPr marL="0" indent="0" algn="l">
               <a:buNone/>
             </a:pPr>
             <a:r>
@@ -10972,7 +10695,7 @@
           </a:bodyPr>
           <a:lstStyle/>
           <a:p>
-            <a:pPr algn="l" indent="0" marL="0">
+            <a:pPr marL="0" indent="0" algn="l">
               <a:buNone/>
             </a:pPr>
             <a:r>
@@ -10989,7 +10712,7 @@
             <a:endParaRPr lang="en-US" sz="1010" dirty="0"/>
           </a:p>
           <a:p>
-            <a:pPr algn="l" indent="0" marL="0">
+            <a:pPr marL="0" indent="0" algn="l">
               <a:buNone/>
             </a:pPr>
             <a:r>
@@ -11033,7 +10756,7 @@
             <a:prstDash val="solid"/>
           </a:ln>
           <a:effectLst>
-            <a:outerShdw sx="100000" sy="100000" kx="0" ky="0" algn="bl" rotWithShape="0" blurRad="12700" dist="50800" dir="2700000">
+            <a:outerShdw blurRad="12700" dist="50800" dir="2700000" algn="bl" rotWithShape="0">
               <a:srgbClr val="000000">
                 <a:alpha val="10000"/>
               </a:srgbClr>
@@ -11091,7 +10814,7 @@
           </a:bodyPr>
           <a:lstStyle/>
           <a:p>
-            <a:pPr algn="l" indent="0" marL="0">
+            <a:pPr marL="0" indent="0" algn="l">
               <a:buNone/>
             </a:pPr>
             <a:r>
@@ -11132,7 +10855,7 @@
           </a:bodyPr>
           <a:lstStyle/>
           <a:p>
-            <a:pPr algn="l" indent="0" marL="0">
+            <a:pPr marL="0" indent="0" algn="l">
               <a:buNone/>
             </a:pPr>
             <a:r>
@@ -11149,7 +10872,7 @@
             <a:endParaRPr lang="en-US" sz="1010" dirty="0"/>
           </a:p>
           <a:p>
-            <a:pPr algn="l" indent="0" marL="0">
+            <a:pPr marL="0" indent="0" algn="l">
               <a:buNone/>
             </a:pPr>
             <a:r>
@@ -11166,7 +10889,7 @@
             <a:endParaRPr lang="en-US" sz="1010" dirty="0"/>
           </a:p>
           <a:p>
-            <a:pPr algn="l" indent="0" marL="0">
+            <a:pPr marL="0" indent="0" algn="l">
               <a:buNone/>
             </a:pPr>
             <a:r>
@@ -11210,7 +10933,7 @@
             <a:prstDash val="solid"/>
           </a:ln>
           <a:effectLst>
-            <a:outerShdw sx="100000" sy="100000" kx="0" ky="0" algn="bl" rotWithShape="0" blurRad="12700" dist="50800" dir="2700000">
+            <a:outerShdw blurRad="12700" dist="50800" dir="2700000" algn="bl" rotWithShape="0">
               <a:srgbClr val="000000">
                 <a:alpha val="10000"/>
               </a:srgbClr>
@@ -11268,7 +10991,7 @@
           </a:bodyPr>
           <a:lstStyle/>
           <a:p>
-            <a:pPr algn="l" indent="0" marL="0">
+            <a:pPr marL="0" indent="0" algn="l">
               <a:buNone/>
             </a:pPr>
             <a:r>
@@ -11309,7 +11032,7 @@
           </a:bodyPr>
           <a:lstStyle/>
           <a:p>
-            <a:pPr algn="l" indent="0" marL="0">
+            <a:pPr marL="0" indent="0" algn="l">
               <a:buNone/>
             </a:pPr>
             <a:r>
@@ -11326,7 +11049,7 @@
             <a:endParaRPr lang="en-US" sz="1010" dirty="0"/>
           </a:p>
           <a:p>
-            <a:pPr algn="l" indent="0" marL="0">
+            <a:pPr marL="0" indent="0" algn="l">
               <a:buNone/>
             </a:pPr>
             <a:r>
@@ -11343,7 +11066,7 @@
             <a:endParaRPr lang="en-US" sz="1010" dirty="0"/>
           </a:p>
           <a:p>
-            <a:pPr algn="l" indent="0" marL="0">
+            <a:pPr marL="0" indent="0" algn="l">
               <a:buNone/>
             </a:pPr>
             <a:r>
@@ -11384,7 +11107,7 @@
           </a:bodyPr>
           <a:lstStyle/>
           <a:p>
-            <a:pPr algn="ctr" indent="0" marL="0">
+            <a:pPr marL="0" indent="0" algn="ctr">
               <a:buNone/>
             </a:pPr>
             <a:r>
@@ -11418,6 +11141,7 @@
         <a:solidFill>
           <a:srgbClr val="0B1220"/>
         </a:solidFill>
+        <a:effectLst/>
       </p:bgPr>
     </p:bg>
     <p:spTree>
@@ -11484,7 +11208,7 @@
           </a:bodyPr>
           <a:lstStyle/>
           <a:p>
-            <a:pPr algn="l" indent="0" marL="0">
+            <a:pPr marL="0" indent="0" algn="l">
               <a:buNone/>
             </a:pPr>
             <a:r>
@@ -11525,7 +11249,7 @@
           </a:bodyPr>
           <a:lstStyle/>
           <a:p>
-            <a:pPr algn="l" indent="0" marL="0">
+            <a:pPr marL="0" indent="0" algn="l">
               <a:buNone/>
             </a:pPr>
             <a:r>
@@ -11542,7 +11266,7 @@
             <a:endParaRPr lang="en-US" sz="1600" dirty="0"/>
           </a:p>
           <a:p>
-            <a:pPr algn="l" indent="0" marL="0">
+            <a:pPr marL="0" indent="0" algn="l">
               <a:buNone/>
             </a:pPr>
             <a:r>
@@ -11586,7 +11310,7 @@
             <a:prstDash val="solid"/>
           </a:ln>
           <a:effectLst>
-            <a:outerShdw sx="100000" sy="100000" kx="0" ky="0" algn="bl" rotWithShape="0" blurRad="12700" dist="50800" dir="2700000">
+            <a:outerShdw blurRad="12700" dist="50800" dir="2700000" algn="bl" rotWithShape="0">
               <a:srgbClr val="000000">
                 <a:alpha val="10000"/>
               </a:srgbClr>
@@ -11644,7 +11368,7 @@
           </a:bodyPr>
           <a:lstStyle/>
           <a:p>
-            <a:pPr algn="l" indent="0" marL="0">
+            <a:pPr marL="0" indent="0" algn="l">
               <a:buNone/>
             </a:pPr>
             <a:r>
@@ -11685,7 +11409,7 @@
           </a:bodyPr>
           <a:lstStyle/>
           <a:p>
-            <a:pPr algn="l" indent="0" marL="0">
+            <a:pPr marL="0" indent="0" algn="l">
               <a:buNone/>
             </a:pPr>
             <a:r>
@@ -11729,7 +11453,7 @@
             <a:prstDash val="solid"/>
           </a:ln>
           <a:effectLst>
-            <a:outerShdw sx="100000" sy="100000" kx="0" ky="0" algn="bl" rotWithShape="0" blurRad="12700" dist="50800" dir="2700000">
+            <a:outerShdw blurRad="12700" dist="50800" dir="2700000" algn="bl" rotWithShape="0">
               <a:srgbClr val="000000">
                 <a:alpha val="10000"/>
               </a:srgbClr>
@@ -11787,7 +11511,7 @@
           </a:bodyPr>
           <a:lstStyle/>
           <a:p>
-            <a:pPr algn="l" indent="0" marL="0">
+            <a:pPr marL="0" indent="0" algn="l">
               <a:buNone/>
             </a:pPr>
             <a:r>
@@ -11828,7 +11552,7 @@
           </a:bodyPr>
           <a:lstStyle/>
           <a:p>
-            <a:pPr algn="l" indent="0" marL="0">
+            <a:pPr marL="0" indent="0" algn="l">
               <a:buNone/>
             </a:pPr>
             <a:r>
@@ -11872,7 +11596,7 @@
             <a:prstDash val="solid"/>
           </a:ln>
           <a:effectLst>
-            <a:outerShdw sx="100000" sy="100000" kx="0" ky="0" algn="bl" rotWithShape="0" blurRad="12700" dist="50800" dir="2700000">
+            <a:outerShdw blurRad="12700" dist="50800" dir="2700000" algn="bl" rotWithShape="0">
               <a:srgbClr val="000000">
                 <a:alpha val="10000"/>
               </a:srgbClr>
@@ -11930,7 +11654,7 @@
           </a:bodyPr>
           <a:lstStyle/>
           <a:p>
-            <a:pPr algn="l" indent="0" marL="0">
+            <a:pPr marL="0" indent="0" algn="l">
               <a:buNone/>
             </a:pPr>
             <a:r>
@@ -11971,7 +11695,7 @@
           </a:bodyPr>
           <a:lstStyle/>
           <a:p>
-            <a:pPr algn="l" indent="0" marL="0">
+            <a:pPr marL="0" indent="0" algn="l">
               <a:buNone/>
             </a:pPr>
             <a:r>
@@ -12012,7 +11736,7 @@
           </a:bodyPr>
           <a:lstStyle/>
           <a:p>
-            <a:pPr algn="ctr" indent="0" marL="0">
+            <a:pPr marL="0" indent="0" algn="ctr">
               <a:buNone/>
             </a:pPr>
             <a:r>
@@ -12082,7 +11806,7 @@
           </a:bodyPr>
           <a:lstStyle/>
           <a:p>
-            <a:pPr algn="ctr" indent="0" marL="0">
+            <a:pPr marL="0" indent="0" algn="ctr">
               <a:buNone/>
             </a:pPr>
             <a:r>
@@ -12116,6 +11840,7 @@
         <a:solidFill>
           <a:srgbClr val="F8FAFC"/>
         </a:solidFill>
+        <a:effectLst/>
       </p:bgPr>
     </p:bg>
     <p:spTree>
@@ -12184,7 +11909,7 @@
           </a:bodyPr>
           <a:lstStyle/>
           <a:p>
-            <a:pPr algn="ctr" indent="0" marL="0">
+            <a:pPr marL="0" indent="0" algn="ctr">
               <a:buNone/>
             </a:pPr>
             <a:r>
@@ -12225,7 +11950,7 @@
           </a:bodyPr>
           <a:lstStyle/>
           <a:p>
-            <a:pPr algn="l" indent="0" marL="0">
+            <a:pPr marL="0" indent="0" algn="l">
               <a:buNone/>
             </a:pPr>
             <a:r>
@@ -12266,7 +11991,7 @@
           </a:bodyPr>
           <a:lstStyle/>
           <a:p>
-            <a:pPr algn="l" indent="0" marL="0">
+            <a:pPr marL="0" indent="0" algn="l">
               <a:buNone/>
             </a:pPr>
             <a:r>
@@ -12363,7 +12088,7 @@
           </a:bodyPr>
           <a:lstStyle/>
           <a:p>
-            <a:pPr algn="ctr" indent="0" marL="0">
+            <a:pPr marL="0" indent="0" algn="ctr">
               <a:buNone/>
             </a:pPr>
             <a:r>
@@ -12460,7 +12185,7 @@
           </a:bodyPr>
           <a:lstStyle/>
           <a:p>
-            <a:pPr algn="ctr" indent="0" marL="0">
+            <a:pPr marL="0" indent="0" algn="ctr">
               <a:buNone/>
             </a:pPr>
             <a:r>
@@ -12501,7 +12226,7 @@
           </a:bodyPr>
           <a:lstStyle/>
           <a:p>
-            <a:pPr algn="l" indent="0" marL="0">
+            <a:pPr marL="0" indent="0" algn="l">
               <a:buNone/>
             </a:pPr>
             <a:r>
@@ -12542,7 +12267,7 @@
           </a:bodyPr>
           <a:lstStyle/>
           <a:p>
-            <a:pPr algn="l" indent="0" marL="0">
+            <a:pPr marL="0" indent="0" algn="l">
               <a:buNone/>
             </a:pPr>
             <a:r>
@@ -12639,7 +12364,7 @@
           </a:bodyPr>
           <a:lstStyle/>
           <a:p>
-            <a:pPr algn="ctr" indent="0" marL="0">
+            <a:pPr marL="0" indent="0" algn="ctr">
               <a:buNone/>
             </a:pPr>
             <a:r>
@@ -12680,7 +12405,7 @@
           </a:bodyPr>
           <a:lstStyle/>
           <a:p>
-            <a:pPr algn="l" indent="0" marL="0">
+            <a:pPr marL="0" indent="0" algn="l">
               <a:buNone/>
             </a:pPr>
             <a:r>
@@ -12721,7 +12446,7 @@
           </a:bodyPr>
           <a:lstStyle/>
           <a:p>
-            <a:pPr algn="l" indent="0" marL="0">
+            <a:pPr marL="0" indent="0" algn="l">
               <a:buNone/>
             </a:pPr>
             <a:r>
@@ -12818,7 +12543,7 @@
           </a:bodyPr>
           <a:lstStyle/>
           <a:p>
-            <a:pPr algn="ctr" indent="0" marL="0">
+            <a:pPr marL="0" indent="0" algn="ctr">
               <a:buNone/>
             </a:pPr>
             <a:r>
@@ -12859,7 +12584,7 @@
           </a:bodyPr>
           <a:lstStyle/>
           <a:p>
-            <a:pPr algn="l" indent="0" marL="0">
+            <a:pPr marL="0" indent="0" algn="l">
               <a:buNone/>
             </a:pPr>
             <a:r>
@@ -12900,7 +12625,7 @@
           </a:bodyPr>
           <a:lstStyle/>
           <a:p>
-            <a:pPr algn="l" indent="0" marL="0">
+            <a:pPr marL="0" indent="0" algn="l">
               <a:buNone/>
             </a:pPr>
             <a:r>
@@ -12997,7 +12722,7 @@
           </a:bodyPr>
           <a:lstStyle/>
           <a:p>
-            <a:pPr algn="ctr" indent="0" marL="0">
+            <a:pPr marL="0" indent="0" algn="ctr">
               <a:buNone/>
             </a:pPr>
             <a:r>
@@ -13038,7 +12763,7 @@
           </a:bodyPr>
           <a:lstStyle/>
           <a:p>
-            <a:pPr algn="l" indent="0" marL="0">
+            <a:pPr marL="0" indent="0" algn="l">
               <a:buNone/>
             </a:pPr>
             <a:r>
@@ -13079,7 +12804,7 @@
           </a:bodyPr>
           <a:lstStyle/>
           <a:p>
-            <a:pPr algn="l" indent="0" marL="0">
+            <a:pPr marL="0" indent="0" algn="l">
               <a:buNone/>
             </a:pPr>
             <a:r>
@@ -13176,7 +12901,7 @@
           </a:bodyPr>
           <a:lstStyle/>
           <a:p>
-            <a:pPr algn="ctr" indent="0" marL="0">
+            <a:pPr marL="0" indent="0" algn="ctr">
               <a:buNone/>
             </a:pPr>
             <a:r>
@@ -13217,7 +12942,7 @@
           </a:bodyPr>
           <a:lstStyle/>
           <a:p>
-            <a:pPr algn="l" indent="0" marL="0">
+            <a:pPr marL="0" indent="0" algn="l">
               <a:buNone/>
             </a:pPr>
             <a:r>
@@ -13258,7 +12983,7 @@
           </a:bodyPr>
           <a:lstStyle/>
           <a:p>
-            <a:pPr algn="l" indent="0" marL="0">
+            <a:pPr marL="0" indent="0" algn="l">
               <a:buNone/>
             </a:pPr>
             <a:r>
@@ -13292,6 +13017,7 @@
         <a:solidFill>
           <a:srgbClr val="F8FAFC"/>
         </a:solidFill>
+        <a:effectLst/>
       </p:bgPr>
     </p:bg>
     <p:spTree>
@@ -13360,7 +13086,7 @@
           </a:bodyPr>
           <a:lstStyle/>
           <a:p>
-            <a:pPr algn="ctr" indent="0" marL="0">
+            <a:pPr marL="0" indent="0" algn="ctr">
               <a:buNone/>
             </a:pPr>
             <a:r>
@@ -13401,7 +13127,7 @@
           </a:bodyPr>
           <a:lstStyle/>
           <a:p>
-            <a:pPr algn="l" indent="0" marL="0">
+            <a:pPr marL="0" indent="0" algn="l">
               <a:buNone/>
             </a:pPr>
             <a:r>
@@ -13442,7 +13168,7 @@
           </a:bodyPr>
           <a:lstStyle/>
           <a:p>
-            <a:pPr algn="l" indent="0" marL="0">
+            <a:pPr marL="0" indent="0" algn="l">
               <a:buNone/>
             </a:pPr>
             <a:r>
@@ -13539,7 +13265,7 @@
           </a:bodyPr>
           <a:lstStyle/>
           <a:p>
-            <a:pPr algn="ctr" indent="0" marL="0">
+            <a:pPr marL="0" indent="0" algn="ctr">
               <a:buNone/>
             </a:pPr>
             <a:r>
@@ -13583,7 +13309,7 @@
             <a:prstDash val="solid"/>
           </a:ln>
           <a:effectLst>
-            <a:outerShdw sx="100000" sy="100000" kx="0" ky="0" algn="bl" rotWithShape="0" blurRad="12700" dist="50800" dir="2700000">
+            <a:outerShdw blurRad="12700" dist="50800" dir="2700000" algn="bl" rotWithShape="0">
               <a:srgbClr val="000000">
                 <a:alpha val="10000"/>
               </a:srgbClr>
@@ -13641,7 +13367,7 @@
           </a:bodyPr>
           <a:lstStyle/>
           <a:p>
-            <a:pPr algn="l" indent="0" marL="0">
+            <a:pPr marL="0" indent="0" algn="l">
               <a:buNone/>
             </a:pPr>
             <a:r>
@@ -13682,7 +13408,7 @@
           </a:bodyPr>
           <a:lstStyle/>
           <a:p>
-            <a:pPr algn="l" indent="0" marL="0">
+            <a:pPr marL="0" indent="0" algn="l">
               <a:buNone/>
             </a:pPr>
             <a:r>
@@ -13699,7 +13425,7 @@
             <a:endParaRPr lang="en-US" sz="1010" dirty="0"/>
           </a:p>
           <a:p>
-            <a:pPr algn="l" indent="0" marL="0">
+            <a:pPr marL="0" indent="0" algn="l">
               <a:buNone/>
             </a:pPr>
             <a:r>
@@ -13743,7 +13469,7 @@
             <a:prstDash val="solid"/>
           </a:ln>
           <a:effectLst>
-            <a:outerShdw sx="100000" sy="100000" kx="0" ky="0" algn="bl" rotWithShape="0" blurRad="12700" dist="50800" dir="2700000">
+            <a:outerShdw blurRad="12700" dist="50800" dir="2700000" algn="bl" rotWithShape="0">
               <a:srgbClr val="000000">
                 <a:alpha val="10000"/>
               </a:srgbClr>
@@ -13801,7 +13527,7 @@
           </a:bodyPr>
           <a:lstStyle/>
           <a:p>
-            <a:pPr algn="l" indent="0" marL="0">
+            <a:pPr marL="0" indent="0" algn="l">
               <a:buNone/>
             </a:pPr>
             <a:r>
@@ -13842,7 +13568,7 @@
           </a:bodyPr>
           <a:lstStyle/>
           <a:p>
-            <a:pPr algn="l" indent="0" marL="0">
+            <a:pPr marL="0" indent="0" algn="l">
               <a:buNone/>
             </a:pPr>
             <a:r>
@@ -13859,7 +13585,7 @@
             <a:endParaRPr lang="en-US" sz="1010" dirty="0"/>
           </a:p>
           <a:p>
-            <a:pPr algn="l" indent="0" marL="0">
+            <a:pPr marL="0" indent="0" algn="l">
               <a:buNone/>
             </a:pPr>
             <a:r>
@@ -13903,7 +13629,7 @@
             <a:prstDash val="solid"/>
           </a:ln>
           <a:effectLst>
-            <a:outerShdw sx="100000" sy="100000" kx="0" ky="0" algn="bl" rotWithShape="0" blurRad="12700" dist="50800" dir="2700000">
+            <a:outerShdw blurRad="12700" dist="50800" dir="2700000" algn="bl" rotWithShape="0">
               <a:srgbClr val="000000">
                 <a:alpha val="10000"/>
               </a:srgbClr>
@@ -13961,7 +13687,7 @@
           </a:bodyPr>
           <a:lstStyle/>
           <a:p>
-            <a:pPr algn="l" indent="0" marL="0">
+            <a:pPr marL="0" indent="0" algn="l">
               <a:buNone/>
             </a:pPr>
             <a:r>
@@ -14002,7 +13728,7 @@
           </a:bodyPr>
           <a:lstStyle/>
           <a:p>
-            <a:pPr algn="l" indent="0" marL="0">
+            <a:pPr marL="0" indent="0" algn="l">
               <a:buNone/>
             </a:pPr>
             <a:r>
@@ -14019,7 +13745,7 @@
             <a:endParaRPr lang="en-US" sz="1010" dirty="0"/>
           </a:p>
           <a:p>
-            <a:pPr algn="l" indent="0" marL="0">
+            <a:pPr marL="0" indent="0" algn="l">
               <a:buNone/>
             </a:pPr>
             <a:r>
@@ -14060,7 +13786,7 @@
           </a:bodyPr>
           <a:lstStyle/>
           <a:p>
-            <a:pPr algn="ctr" indent="0" marL="0">
+            <a:pPr marL="0" indent="0" algn="ctr">
               <a:buNone/>
             </a:pPr>
             <a:r>
@@ -14101,7 +13827,7 @@
           </a:bodyPr>
           <a:lstStyle/>
           <a:p>
-            <a:pPr algn="l" indent="0" marL="0">
+            <a:pPr marL="0" indent="0" algn="l">
               <a:buNone/>
             </a:pPr>
             <a:r>
@@ -14135,6 +13861,7 @@
         <a:solidFill>
           <a:srgbClr val="F8FAFC"/>
         </a:solidFill>
+        <a:effectLst/>
       </p:bgPr>
     </p:bg>
     <p:spTree>
@@ -14203,7 +13930,7 @@
           </a:bodyPr>
           <a:lstStyle/>
           <a:p>
-            <a:pPr algn="ctr" indent="0" marL="0">
+            <a:pPr marL="0" indent="0" algn="ctr">
               <a:buNone/>
             </a:pPr>
             <a:r>
@@ -14229,22 +13956,22 @@
         </p:nvSpPr>
         <p:spPr>
           <a:xfrm>
-            <a:off x="1261872" y="210312"/>
-            <a:ext cx="7086600" cy="310896"/>
-          </a:xfrm>
-          <a:prstGeom prst="rect">
-            <a:avLst/>
-          </a:prstGeom>
-          <a:noFill/>
-          <a:ln/>
-        </p:spPr>
-        <p:txBody>
-          <a:bodyPr wrap="square" lIns="0" tIns="0" rIns="0" bIns="0" rtlCol="0" anchor="t">
-            <a:normAutofit/>
-          </a:bodyPr>
-          <a:lstStyle/>
-          <a:p>
-            <a:pPr algn="l" indent="0" marL="0">
+            <a:off x="1261871" y="210312"/>
+            <a:ext cx="7350193" cy="310896"/>
+          </a:xfrm>
+          <a:prstGeom prst="rect">
+            <a:avLst/>
+          </a:prstGeom>
+          <a:noFill/>
+          <a:ln/>
+        </p:spPr>
+        <p:txBody>
+          <a:bodyPr wrap="square" lIns="0" tIns="0" rIns="0" bIns="0" rtlCol="0" anchor="t">
+            <a:normAutofit fontScale="85000" lnSpcReduction="10000"/>
+          </a:bodyPr>
+          <a:lstStyle/>
+          <a:p>
+            <a:pPr marL="0" indent="0" algn="l">
               <a:buNone/>
             </a:pPr>
             <a:r>
@@ -14285,7 +14012,7 @@
           </a:bodyPr>
           <a:lstStyle/>
           <a:p>
-            <a:pPr algn="l" indent="0" marL="0">
+            <a:pPr marL="0" indent="0" algn="l">
               <a:buNone/>
             </a:pPr>
             <a:r>
@@ -14382,7 +14109,7 @@
           </a:bodyPr>
           <a:lstStyle/>
           <a:p>
-            <a:pPr algn="ctr" indent="0" marL="0">
+            <a:pPr marL="0" indent="0" algn="ctr">
               <a:buNone/>
             </a:pPr>
             <a:r>
@@ -14426,7 +14153,7 @@
             <a:prstDash val="solid"/>
           </a:ln>
           <a:effectLst>
-            <a:outerShdw sx="100000" sy="100000" kx="0" ky="0" algn="bl" rotWithShape="0" blurRad="12700" dist="50800" dir="2700000">
+            <a:outerShdw blurRad="12700" dist="50800" dir="2700000" algn="bl" rotWithShape="0">
               <a:srgbClr val="000000">
                 <a:alpha val="10000"/>
               </a:srgbClr>
@@ -14457,7 +14184,7 @@
           </a:bodyPr>
           <a:lstStyle/>
           <a:p>
-            <a:pPr algn="ctr" indent="0" marL="0">
+            <a:pPr marL="0" indent="0" algn="ctr">
               <a:buNone/>
             </a:pPr>
             <a:r>
@@ -14498,7 +14225,7 @@
           </a:bodyPr>
           <a:lstStyle/>
           <a:p>
-            <a:pPr algn="ctr" indent="0" marL="0">
+            <a:pPr marL="0" indent="0" algn="ctr">
               <a:buNone/>
             </a:pPr>
             <a:r>
@@ -14567,7 +14294,7 @@
             <a:prstDash val="solid"/>
           </a:ln>
           <a:effectLst>
-            <a:outerShdw sx="100000" sy="100000" kx="0" ky="0" algn="bl" rotWithShape="0" blurRad="12700" dist="50800" dir="2700000">
+            <a:outerShdw blurRad="12700" dist="50800" dir="2700000" algn="bl" rotWithShape="0">
               <a:srgbClr val="000000">
                 <a:alpha val="10000"/>
               </a:srgbClr>
@@ -14598,7 +14325,7 @@
           </a:bodyPr>
           <a:lstStyle/>
           <a:p>
-            <a:pPr algn="ctr" indent="0" marL="0">
+            <a:pPr marL="0" indent="0" algn="ctr">
               <a:buNone/>
             </a:pPr>
             <a:r>
@@ -14639,7 +14366,7 @@
           </a:bodyPr>
           <a:lstStyle/>
           <a:p>
-            <a:pPr algn="ctr" indent="0" marL="0">
+            <a:pPr marL="0" indent="0" algn="ctr">
               <a:buNone/>
             </a:pPr>
             <a:r>
@@ -14708,7 +14435,7 @@
             <a:prstDash val="solid"/>
           </a:ln>
           <a:effectLst>
-            <a:outerShdw sx="100000" sy="100000" kx="0" ky="0" algn="bl" rotWithShape="0" blurRad="12700" dist="50800" dir="2700000">
+            <a:outerShdw blurRad="12700" dist="50800" dir="2700000" algn="bl" rotWithShape="0">
               <a:srgbClr val="000000">
                 <a:alpha val="10000"/>
               </a:srgbClr>
@@ -14739,7 +14466,7 @@
           </a:bodyPr>
           <a:lstStyle/>
           <a:p>
-            <a:pPr algn="ctr" indent="0" marL="0">
+            <a:pPr marL="0" indent="0" algn="ctr">
               <a:buNone/>
             </a:pPr>
             <a:r>
@@ -14780,7 +14507,7 @@
           </a:bodyPr>
           <a:lstStyle/>
           <a:p>
-            <a:pPr algn="ctr" indent="0" marL="0">
+            <a:pPr marL="0" indent="0" algn="ctr">
               <a:buNone/>
             </a:pPr>
             <a:r>
@@ -14849,7 +14576,7 @@
             <a:prstDash val="solid"/>
           </a:ln>
           <a:effectLst>
-            <a:outerShdw sx="100000" sy="100000" kx="0" ky="0" algn="bl" rotWithShape="0" blurRad="12700" dist="50800" dir="2700000">
+            <a:outerShdw blurRad="12700" dist="50800" dir="2700000" algn="bl" rotWithShape="0">
               <a:srgbClr val="000000">
                 <a:alpha val="10000"/>
               </a:srgbClr>
@@ -14880,7 +14607,7 @@
           </a:bodyPr>
           <a:lstStyle/>
           <a:p>
-            <a:pPr algn="ctr" indent="0" marL="0">
+            <a:pPr marL="0" indent="0" algn="ctr">
               <a:buNone/>
             </a:pPr>
             <a:r>
@@ -14921,7 +14648,7 @@
           </a:bodyPr>
           <a:lstStyle/>
           <a:p>
-            <a:pPr algn="ctr" indent="0" marL="0">
+            <a:pPr marL="0" indent="0" algn="ctr">
               <a:buNone/>
             </a:pPr>
             <a:r>
@@ -14990,7 +14717,7 @@
             <a:prstDash val="solid"/>
           </a:ln>
           <a:effectLst>
-            <a:outerShdw sx="100000" sy="100000" kx="0" ky="0" algn="bl" rotWithShape="0" blurRad="12700" dist="50800" dir="2700000">
+            <a:outerShdw blurRad="12700" dist="50800" dir="2700000" algn="bl" rotWithShape="0">
               <a:srgbClr val="000000">
                 <a:alpha val="10000"/>
               </a:srgbClr>
@@ -15021,7 +14748,7 @@
           </a:bodyPr>
           <a:lstStyle/>
           <a:p>
-            <a:pPr algn="ctr" indent="0" marL="0">
+            <a:pPr marL="0" indent="0" algn="ctr">
               <a:buNone/>
             </a:pPr>
             <a:r>
@@ -15062,7 +14789,7 @@
           </a:bodyPr>
           <a:lstStyle/>
           <a:p>
-            <a:pPr algn="ctr" indent="0" marL="0">
+            <a:pPr marL="0" indent="0" algn="ctr">
               <a:buNone/>
             </a:pPr>
             <a:r>
@@ -15106,7 +14833,7 @@
             <a:prstDash val="solid"/>
           </a:ln>
           <a:effectLst>
-            <a:outerShdw sx="100000" sy="100000" kx="0" ky="0" algn="bl" rotWithShape="0" blurRad="12700" dist="50800" dir="2700000">
+            <a:outerShdw blurRad="12700" dist="50800" dir="2700000" algn="bl" rotWithShape="0">
               <a:srgbClr val="000000">
                 <a:alpha val="10000"/>
               </a:srgbClr>
@@ -15164,7 +14891,7 @@
           </a:bodyPr>
           <a:lstStyle/>
           <a:p>
-            <a:pPr algn="l" indent="0" marL="0">
+            <a:pPr marL="0" indent="0" algn="l">
               <a:buNone/>
             </a:pPr>
             <a:r>
@@ -15205,7 +14932,7 @@
           </a:bodyPr>
           <a:lstStyle/>
           <a:p>
-            <a:pPr algn="l" indent="0" marL="0">
+            <a:pPr marL="0" indent="0" algn="l">
               <a:buNone/>
             </a:pPr>
             <a:r>
@@ -15249,7 +14976,7 @@
             <a:prstDash val="solid"/>
           </a:ln>
           <a:effectLst>
-            <a:outerShdw sx="100000" sy="100000" kx="0" ky="0" algn="bl" rotWithShape="0" blurRad="12700" dist="50800" dir="2700000">
+            <a:outerShdw blurRad="12700" dist="50800" dir="2700000" algn="bl" rotWithShape="0">
               <a:srgbClr val="000000">
                 <a:alpha val="10000"/>
               </a:srgbClr>
@@ -15307,7 +15034,7 @@
           </a:bodyPr>
           <a:lstStyle/>
           <a:p>
-            <a:pPr algn="l" indent="0" marL="0">
+            <a:pPr marL="0" indent="0" algn="l">
               <a:buNone/>
             </a:pPr>
             <a:r>
@@ -15348,7 +15075,7 @@
           </a:bodyPr>
           <a:lstStyle/>
           <a:p>
-            <a:pPr algn="l" indent="0" marL="0">
+            <a:pPr marL="0" indent="0" algn="l">
               <a:buNone/>
             </a:pPr>
             <a:r>
@@ -15392,7 +15119,7 @@
             <a:prstDash val="solid"/>
           </a:ln>
           <a:effectLst>
-            <a:outerShdw sx="100000" sy="100000" kx="0" ky="0" algn="bl" rotWithShape="0" blurRad="12700" dist="50800" dir="2700000">
+            <a:outerShdw blurRad="12700" dist="50800" dir="2700000" algn="bl" rotWithShape="0">
               <a:srgbClr val="000000">
                 <a:alpha val="10000"/>
               </a:srgbClr>
@@ -15450,7 +15177,7 @@
           </a:bodyPr>
           <a:lstStyle/>
           <a:p>
-            <a:pPr algn="l" indent="0" marL="0">
+            <a:pPr marL="0" indent="0" algn="l">
               <a:buNone/>
             </a:pPr>
             <a:r>
@@ -15491,7 +15218,7 @@
           </a:bodyPr>
           <a:lstStyle/>
           <a:p>
-            <a:pPr algn="l" indent="0" marL="0">
+            <a:pPr marL="0" indent="0" algn="l">
               <a:buNone/>
             </a:pPr>
             <a:r>
@@ -15532,7 +15259,7 @@
           </a:bodyPr>
           <a:lstStyle/>
           <a:p>
-            <a:pPr algn="l" indent="0" marL="0">
+            <a:pPr marL="0" indent="0" algn="l">
               <a:buNone/>
             </a:pPr>
             <a:r>
@@ -15566,6 +15293,7 @@
         <a:solidFill>
           <a:srgbClr val="F8FAFC"/>
         </a:solidFill>
+        <a:effectLst/>
       </p:bgPr>
     </p:bg>
     <p:spTree>
@@ -15634,7 +15362,7 @@
           </a:bodyPr>
           <a:lstStyle/>
           <a:p>
-            <a:pPr algn="ctr" indent="0" marL="0">
+            <a:pPr marL="0" indent="0" algn="ctr">
               <a:buNone/>
             </a:pPr>
             <a:r>
@@ -15675,7 +15403,7 @@
           </a:bodyPr>
           <a:lstStyle/>
           <a:p>
-            <a:pPr algn="l" indent="0" marL="0">
+            <a:pPr marL="0" indent="0" algn="l">
               <a:buNone/>
             </a:pPr>
             <a:r>
@@ -15716,7 +15444,7 @@
           </a:bodyPr>
           <a:lstStyle/>
           <a:p>
-            <a:pPr algn="l" indent="0" marL="0">
+            <a:pPr marL="0" indent="0" algn="l">
               <a:buNone/>
             </a:pPr>
             <a:r>
@@ -15813,7 +15541,7 @@
           </a:bodyPr>
           <a:lstStyle/>
           <a:p>
-            <a:pPr algn="ctr" indent="0" marL="0">
+            <a:pPr marL="0" indent="0" algn="ctr">
               <a:buNone/>
             </a:pPr>
             <a:r>
@@ -15910,7 +15638,7 @@
           </a:bodyPr>
           <a:lstStyle/>
           <a:p>
-            <a:pPr algn="ctr" indent="0" marL="0">
+            <a:pPr marL="0" indent="0" algn="ctr">
               <a:buNone/>
             </a:pPr>
             <a:r>
@@ -15951,7 +15679,7 @@
           </a:bodyPr>
           <a:lstStyle/>
           <a:p>
-            <a:pPr algn="l" indent="0" marL="0">
+            <a:pPr marL="0" indent="0" algn="l">
               <a:buNone/>
             </a:pPr>
             <a:r>
@@ -16073,7 +15801,7 @@
           </a:bodyPr>
           <a:lstStyle/>
           <a:p>
-            <a:pPr algn="ctr" indent="0" marL="0">
+            <a:pPr marL="0" indent="0" algn="ctr">
               <a:buNone/>
             </a:pPr>
             <a:r>
@@ -16114,7 +15842,7 @@
           </a:bodyPr>
           <a:lstStyle/>
           <a:p>
-            <a:pPr algn="l" indent="0" marL="0">
+            <a:pPr marL="0" indent="0" algn="l">
               <a:buNone/>
             </a:pPr>
             <a:r>
@@ -16236,7 +15964,7 @@
           </a:bodyPr>
           <a:lstStyle/>
           <a:p>
-            <a:pPr algn="ctr" indent="0" marL="0">
+            <a:pPr marL="0" indent="0" algn="ctr">
               <a:buNone/>
             </a:pPr>
             <a:r>
@@ -16277,7 +16005,7 @@
           </a:bodyPr>
           <a:lstStyle/>
           <a:p>
-            <a:pPr algn="l" indent="0" marL="0">
+            <a:pPr marL="0" indent="0" algn="l">
               <a:buNone/>
             </a:pPr>
             <a:r>
@@ -16399,7 +16127,7 @@
           </a:bodyPr>
           <a:lstStyle/>
           <a:p>
-            <a:pPr algn="ctr" indent="0" marL="0">
+            <a:pPr marL="0" indent="0" algn="ctr">
               <a:buNone/>
             </a:pPr>
             <a:r>
@@ -16440,7 +16168,7 @@
           </a:bodyPr>
           <a:lstStyle/>
           <a:p>
-            <a:pPr algn="l" indent="0" marL="0">
+            <a:pPr marL="0" indent="0" algn="l">
               <a:buNone/>
             </a:pPr>
             <a:r>
@@ -16562,7 +16290,7 @@
           </a:bodyPr>
           <a:lstStyle/>
           <a:p>
-            <a:pPr algn="ctr" indent="0" marL="0">
+            <a:pPr marL="0" indent="0" algn="ctr">
               <a:buNone/>
             </a:pPr>
             <a:r>
@@ -16603,7 +16331,7 @@
           </a:bodyPr>
           <a:lstStyle/>
           <a:p>
-            <a:pPr algn="l" indent="0" marL="0">
+            <a:pPr marL="0" indent="0" algn="l">
               <a:buNone/>
             </a:pPr>
             <a:r>
@@ -16637,6 +16365,7 @@
         <a:solidFill>
           <a:srgbClr val="F8FAFC"/>
         </a:solidFill>
+        <a:effectLst/>
       </p:bgPr>
     </p:bg>
     <p:spTree>
@@ -16705,7 +16434,7 @@
           </a:bodyPr>
           <a:lstStyle/>
           <a:p>
-            <a:pPr algn="ctr" indent="0" marL="0">
+            <a:pPr marL="0" indent="0" algn="ctr">
               <a:buNone/>
             </a:pPr>
             <a:r>
@@ -16746,7 +16475,7 @@
           </a:bodyPr>
           <a:lstStyle/>
           <a:p>
-            <a:pPr algn="l" indent="0" marL="0">
+            <a:pPr marL="0" indent="0" algn="l">
               <a:buNone/>
             </a:pPr>
             <a:r>
@@ -16787,7 +16516,7 @@
           </a:bodyPr>
           <a:lstStyle/>
           <a:p>
-            <a:pPr algn="l" indent="0" marL="0">
+            <a:pPr marL="0" indent="0" algn="l">
               <a:buNone/>
             </a:pPr>
             <a:r>
@@ -16884,7 +16613,7 @@
           </a:bodyPr>
           <a:lstStyle/>
           <a:p>
-            <a:pPr algn="ctr" indent="0" marL="0">
+            <a:pPr marL="0" indent="0" algn="ctr">
               <a:buNone/>
             </a:pPr>
             <a:r>
@@ -16928,7 +16657,7 @@
             <a:prstDash val="solid"/>
           </a:ln>
           <a:effectLst>
-            <a:outerShdw sx="100000" sy="100000" kx="0" ky="0" algn="bl" rotWithShape="0" blurRad="12700" dist="50800" dir="2700000">
+            <a:outerShdw blurRad="12700" dist="50800" dir="2700000" algn="bl" rotWithShape="0">
               <a:srgbClr val="000000">
                 <a:alpha val="10000"/>
               </a:srgbClr>
@@ -16959,7 +16688,7 @@
           </a:bodyPr>
           <a:lstStyle/>
           <a:p>
-            <a:pPr algn="ctr" indent="0" marL="0">
+            <a:pPr marL="0" indent="0" algn="ctr">
               <a:buNone/>
             </a:pPr>
             <a:r>
@@ -17000,7 +16729,7 @@
           </a:bodyPr>
           <a:lstStyle/>
           <a:p>
-            <a:pPr algn="ctr" indent="0" marL="0">
+            <a:pPr marL="0" indent="0" algn="ctr">
               <a:buNone/>
             </a:pPr>
             <a:r>
@@ -17044,7 +16773,7 @@
             <a:prstDash val="solid"/>
           </a:ln>
           <a:effectLst>
-            <a:outerShdw sx="100000" sy="100000" kx="0" ky="0" algn="bl" rotWithShape="0" blurRad="12700" dist="50800" dir="2700000">
+            <a:outerShdw blurRad="12700" dist="50800" dir="2700000" algn="bl" rotWithShape="0">
               <a:srgbClr val="000000">
                 <a:alpha val="10000"/>
               </a:srgbClr>
@@ -17075,7 +16804,7 @@
           </a:bodyPr>
           <a:lstStyle/>
           <a:p>
-            <a:pPr algn="ctr" indent="0" marL="0">
+            <a:pPr marL="0" indent="0" algn="ctr">
               <a:buNone/>
             </a:pPr>
             <a:r>
@@ -17116,7 +16845,7 @@
           </a:bodyPr>
           <a:lstStyle/>
           <a:p>
-            <a:pPr algn="ctr" indent="0" marL="0">
+            <a:pPr marL="0" indent="0" algn="ctr">
               <a:buNone/>
             </a:pPr>
             <a:r>
@@ -17160,7 +16889,7 @@
             <a:prstDash val="solid"/>
           </a:ln>
           <a:effectLst>
-            <a:outerShdw sx="100000" sy="100000" kx="0" ky="0" algn="bl" rotWithShape="0" blurRad="12700" dist="50800" dir="2700000">
+            <a:outerShdw blurRad="12700" dist="50800" dir="2700000" algn="bl" rotWithShape="0">
               <a:srgbClr val="000000">
                 <a:alpha val="10000"/>
               </a:srgbClr>
@@ -17191,7 +16920,7 @@
           </a:bodyPr>
           <a:lstStyle/>
           <a:p>
-            <a:pPr algn="ctr" indent="0" marL="0">
+            <a:pPr marL="0" indent="0" algn="ctr">
               <a:buNone/>
             </a:pPr>
             <a:r>
@@ -17232,7 +16961,7 @@
           </a:bodyPr>
           <a:lstStyle/>
           <a:p>
-            <a:pPr algn="ctr" indent="0" marL="0">
+            <a:pPr marL="0" indent="0" algn="ctr">
               <a:buNone/>
             </a:pPr>
             <a:r>
@@ -17276,7 +17005,7 @@
             <a:prstDash val="solid"/>
           </a:ln>
           <a:effectLst>
-            <a:outerShdw sx="100000" sy="100000" kx="0" ky="0" algn="bl" rotWithShape="0" blurRad="12700" dist="50800" dir="2700000">
+            <a:outerShdw blurRad="12700" dist="50800" dir="2700000" algn="bl" rotWithShape="0">
               <a:srgbClr val="000000">
                 <a:alpha val="10000"/>
               </a:srgbClr>
@@ -17307,7 +17036,7 @@
           </a:bodyPr>
           <a:lstStyle/>
           <a:p>
-            <a:pPr algn="ctr" indent="0" marL="0">
+            <a:pPr marL="0" indent="0" algn="ctr">
               <a:buNone/>
             </a:pPr>
             <a:r>
@@ -17348,7 +17077,7 @@
           </a:bodyPr>
           <a:lstStyle/>
           <a:p>
-            <a:pPr algn="ctr" indent="0" marL="0">
+            <a:pPr marL="0" indent="0" algn="ctr">
               <a:buNone/>
             </a:pPr>
             <a:r>
@@ -17392,7 +17121,7 @@
             <a:prstDash val="solid"/>
           </a:ln>
           <a:effectLst>
-            <a:outerShdw sx="100000" sy="100000" kx="0" ky="0" algn="bl" rotWithShape="0" blurRad="12700" dist="50800" dir="2700000">
+            <a:outerShdw blurRad="12700" dist="50800" dir="2700000" algn="bl" rotWithShape="0">
               <a:srgbClr val="000000">
                 <a:alpha val="10000"/>
               </a:srgbClr>
@@ -17423,7 +17152,7 @@
           </a:bodyPr>
           <a:lstStyle/>
           <a:p>
-            <a:pPr algn="ctr" indent="0" marL="0">
+            <a:pPr marL="0" indent="0" algn="ctr">
               <a:buNone/>
             </a:pPr>
             <a:r>
@@ -17464,7 +17193,7 @@
           </a:bodyPr>
           <a:lstStyle/>
           <a:p>
-            <a:pPr algn="ctr" indent="0" marL="0">
+            <a:pPr marL="0" indent="0" algn="ctr">
               <a:buNone/>
             </a:pPr>
             <a:r>
@@ -17508,7 +17237,7 @@
             <a:prstDash val="solid"/>
           </a:ln>
           <a:effectLst>
-            <a:outerShdw sx="100000" sy="100000" kx="0" ky="0" algn="bl" rotWithShape="0" blurRad="12700" dist="50800" dir="2700000">
+            <a:outerShdw blurRad="12700" dist="50800" dir="2700000" algn="bl" rotWithShape="0">
               <a:srgbClr val="000000">
                 <a:alpha val="10000"/>
               </a:srgbClr>
@@ -17566,7 +17295,7 @@
           </a:bodyPr>
           <a:lstStyle/>
           <a:p>
-            <a:pPr algn="l" indent="0" marL="0">
+            <a:pPr marL="0" indent="0" algn="l">
               <a:buNone/>
             </a:pPr>
             <a:r>
@@ -17607,7 +17336,7 @@
           </a:bodyPr>
           <a:lstStyle/>
           <a:p>
-            <a:pPr algn="l" indent="0" marL="0">
+            <a:pPr marL="0" indent="0" algn="l">
               <a:buNone/>
             </a:pPr>
             <a:r>
@@ -17624,7 +17353,7 @@
             <a:endParaRPr lang="en-US" sz="1010" dirty="0"/>
           </a:p>
           <a:p>
-            <a:pPr algn="l" indent="0" marL="0">
+            <a:pPr marL="0" indent="0" algn="l">
               <a:buNone/>
             </a:pPr>
             <a:r>
@@ -17641,7 +17370,7 @@
             <a:endParaRPr lang="en-US" sz="1010" dirty="0"/>
           </a:p>
           <a:p>
-            <a:pPr algn="l" indent="0" marL="0">
+            <a:pPr marL="0" indent="0" algn="l">
               <a:buNone/>
             </a:pPr>
             <a:r>
@@ -17685,7 +17414,7 @@
             <a:prstDash val="solid"/>
           </a:ln>
           <a:effectLst>
-            <a:outerShdw sx="100000" sy="100000" kx="0" ky="0" algn="bl" rotWithShape="0" blurRad="12700" dist="50800" dir="2700000">
+            <a:outerShdw blurRad="12700" dist="50800" dir="2700000" algn="bl" rotWithShape="0">
               <a:srgbClr val="000000">
                 <a:alpha val="10000"/>
               </a:srgbClr>
@@ -17743,7 +17472,7 @@
           </a:bodyPr>
           <a:lstStyle/>
           <a:p>
-            <a:pPr algn="l" indent="0" marL="0">
+            <a:pPr marL="0" indent="0" algn="l">
               <a:buNone/>
             </a:pPr>
             <a:r>
@@ -17784,7 +17513,7 @@
           </a:bodyPr>
           <a:lstStyle/>
           <a:p>
-            <a:pPr algn="l" indent="0" marL="0">
+            <a:pPr marL="0" indent="0" algn="l">
               <a:buNone/>
             </a:pPr>
             <a:r>
@@ -17801,7 +17530,7 @@
             <a:endParaRPr lang="en-US" sz="1010" dirty="0"/>
           </a:p>
           <a:p>
-            <a:pPr algn="l" indent="0" marL="0">
+            <a:pPr marL="0" indent="0" algn="l">
               <a:buNone/>
             </a:pPr>
             <a:r>
@@ -17818,7 +17547,7 @@
             <a:endParaRPr lang="en-US" sz="1010" dirty="0"/>
           </a:p>
           <a:p>
-            <a:pPr algn="l" indent="0" marL="0">
+            <a:pPr marL="0" indent="0" algn="l">
               <a:buNone/>
             </a:pPr>
             <a:r>
@@ -17862,7 +17591,7 @@
             <a:prstDash val="solid"/>
           </a:ln>
           <a:effectLst>
-            <a:outerShdw sx="100000" sy="100000" kx="0" ky="0" algn="bl" rotWithShape="0" blurRad="12700" dist="50800" dir="2700000">
+            <a:outerShdw blurRad="12700" dist="50800" dir="2700000" algn="bl" rotWithShape="0">
               <a:srgbClr val="000000">
                 <a:alpha val="10000"/>
               </a:srgbClr>
@@ -17920,7 +17649,7 @@
           </a:bodyPr>
           <a:lstStyle/>
           <a:p>
-            <a:pPr algn="l" indent="0" marL="0">
+            <a:pPr marL="0" indent="0" algn="l">
               <a:buNone/>
             </a:pPr>
             <a:r>
@@ -17961,7 +17690,7 @@
           </a:bodyPr>
           <a:lstStyle/>
           <a:p>
-            <a:pPr algn="l" indent="0" marL="0">
+            <a:pPr marL="0" indent="0" algn="l">
               <a:buNone/>
             </a:pPr>
             <a:r>
@@ -17978,7 +17707,7 @@
             <a:endParaRPr lang="en-US" sz="1010" dirty="0"/>
           </a:p>
           <a:p>
-            <a:pPr algn="l" indent="0" marL="0">
+            <a:pPr marL="0" indent="0" algn="l">
               <a:buNone/>
             </a:pPr>
             <a:r>
@@ -17995,7 +17724,7 @@
             <a:endParaRPr lang="en-US" sz="1010" dirty="0"/>
           </a:p>
           <a:p>
-            <a:pPr algn="l" indent="0" marL="0">
+            <a:pPr marL="0" indent="0" algn="l">
               <a:buNone/>
             </a:pPr>
             <a:r>
@@ -18036,7 +17765,7 @@
           </a:bodyPr>
           <a:lstStyle/>
           <a:p>
-            <a:pPr algn="ctr" indent="0" marL="0">
+            <a:pPr marL="0" indent="0" algn="ctr">
               <a:buNone/>
             </a:pPr>
             <a:r>
@@ -18070,6 +17799,7 @@
         <a:solidFill>
           <a:srgbClr val="F8FAFC"/>
         </a:solidFill>
+        <a:effectLst/>
       </p:bgPr>
     </p:bg>
     <p:spTree>
@@ -18138,7 +17868,7 @@
           </a:bodyPr>
           <a:lstStyle/>
           <a:p>
-            <a:pPr algn="ctr" indent="0" marL="0">
+            <a:pPr marL="0" indent="0" algn="ctr">
               <a:buNone/>
             </a:pPr>
             <a:r>
@@ -18179,7 +17909,7 @@
           </a:bodyPr>
           <a:lstStyle/>
           <a:p>
-            <a:pPr algn="l" indent="0" marL="0">
+            <a:pPr marL="0" indent="0" algn="l">
               <a:buNone/>
             </a:pPr>
             <a:r>
@@ -18220,7 +17950,7 @@
           </a:bodyPr>
           <a:lstStyle/>
           <a:p>
-            <a:pPr algn="l" indent="0" marL="0">
+            <a:pPr marL="0" indent="0" algn="l">
               <a:buNone/>
             </a:pPr>
             <a:r>
@@ -18317,7 +18047,7 @@
           </a:bodyPr>
           <a:lstStyle/>
           <a:p>
-            <a:pPr algn="ctr" indent="0" marL="0">
+            <a:pPr marL="0" indent="0" algn="ctr">
               <a:buNone/>
             </a:pPr>
             <a:r>
@@ -18361,7 +18091,7 @@
             <a:prstDash val="solid"/>
           </a:ln>
           <a:effectLst>
-            <a:outerShdw sx="100000" sy="100000" kx="0" ky="0" algn="bl" rotWithShape="0" blurRad="12700" dist="50800" dir="2700000">
+            <a:outerShdw blurRad="12700" dist="50800" dir="2700000" algn="bl" rotWithShape="0">
               <a:srgbClr val="000000">
                 <a:alpha val="10000"/>
               </a:srgbClr>
@@ -18419,7 +18149,7 @@
           </a:bodyPr>
           <a:lstStyle/>
           <a:p>
-            <a:pPr algn="l" indent="0" marL="0">
+            <a:pPr marL="0" indent="0" algn="l">
               <a:buNone/>
             </a:pPr>
             <a:r>
@@ -18460,7 +18190,7 @@
           </a:bodyPr>
           <a:lstStyle/>
           <a:p>
-            <a:pPr algn="l" indent="0" marL="0">
+            <a:pPr marL="0" indent="0" algn="l">
               <a:buNone/>
             </a:pPr>
             <a:r>
@@ -18477,7 +18207,7 @@
             <a:endParaRPr lang="en-US" sz="1010" dirty="0"/>
           </a:p>
           <a:p>
-            <a:pPr algn="l" indent="0" marL="0">
+            <a:pPr marL="0" indent="0" algn="l">
               <a:buNone/>
             </a:pPr>
             <a:r>
@@ -18494,7 +18224,7 @@
             <a:endParaRPr lang="en-US" sz="1010" dirty="0"/>
           </a:p>
           <a:p>
-            <a:pPr algn="l" indent="0" marL="0">
+            <a:pPr marL="0" indent="0" algn="l">
               <a:buNone/>
             </a:pPr>
             <a:r>
@@ -18511,7 +18241,7 @@
             <a:endParaRPr lang="en-US" sz="1010" dirty="0"/>
           </a:p>
           <a:p>
-            <a:pPr algn="l" indent="0" marL="0">
+            <a:pPr marL="0" indent="0" algn="l">
               <a:buNone/>
             </a:pPr>
             <a:r>
@@ -18555,7 +18285,7 @@
             <a:prstDash val="solid"/>
           </a:ln>
           <a:effectLst>
-            <a:outerShdw sx="100000" sy="100000" kx="0" ky="0" algn="bl" rotWithShape="0" blurRad="12700" dist="50800" dir="2700000">
+            <a:outerShdw blurRad="12700" dist="50800" dir="2700000" algn="bl" rotWithShape="0">
               <a:srgbClr val="000000">
                 <a:alpha val="10000"/>
               </a:srgbClr>
@@ -18613,7 +18343,7 @@
           </a:bodyPr>
           <a:lstStyle/>
           <a:p>
-            <a:pPr algn="l" indent="0" marL="0">
+            <a:pPr marL="0" indent="0" algn="l">
               <a:buNone/>
             </a:pPr>
             <a:r>
@@ -18654,7 +18384,7 @@
           </a:bodyPr>
           <a:lstStyle/>
           <a:p>
-            <a:pPr algn="l" indent="0" marL="0">
+            <a:pPr marL="0" indent="0" algn="l">
               <a:buNone/>
             </a:pPr>
             <a:r>
@@ -18671,7 +18401,7 @@
             <a:endParaRPr lang="en-US" sz="1010" dirty="0"/>
           </a:p>
           <a:p>
-            <a:pPr algn="l" indent="0" marL="0">
+            <a:pPr marL="0" indent="0" algn="l">
               <a:buNone/>
             </a:pPr>
             <a:r>
@@ -18688,7 +18418,7 @@
             <a:endParaRPr lang="en-US" sz="1010" dirty="0"/>
           </a:p>
           <a:p>
-            <a:pPr algn="l" indent="0" marL="0">
+            <a:pPr marL="0" indent="0" algn="l">
               <a:buNone/>
             </a:pPr>
             <a:r>
@@ -18705,7 +18435,7 @@
             <a:endParaRPr lang="en-US" sz="1010" dirty="0"/>
           </a:p>
           <a:p>
-            <a:pPr algn="l" indent="0" marL="0">
+            <a:pPr marL="0" indent="0" algn="l">
               <a:buNone/>
             </a:pPr>
             <a:r>
@@ -18749,7 +18479,7 @@
             <a:prstDash val="solid"/>
           </a:ln>
           <a:effectLst>
-            <a:outerShdw sx="100000" sy="100000" kx="0" ky="0" algn="bl" rotWithShape="0" blurRad="12700" dist="50800" dir="2700000">
+            <a:outerShdw blurRad="12700" dist="50800" dir="2700000" algn="bl" rotWithShape="0">
               <a:srgbClr val="000000">
                 <a:alpha val="10000"/>
               </a:srgbClr>
@@ -18807,7 +18537,7 @@
           </a:bodyPr>
           <a:lstStyle/>
           <a:p>
-            <a:pPr algn="l" indent="0" marL="0">
+            <a:pPr marL="0" indent="0" algn="l">
               <a:buNone/>
             </a:pPr>
             <a:r>
@@ -18848,7 +18578,7 @@
           </a:bodyPr>
           <a:lstStyle/>
           <a:p>
-            <a:pPr algn="l" indent="0" marL="0">
+            <a:pPr marL="0" indent="0" algn="l">
               <a:buNone/>
             </a:pPr>
             <a:r>
@@ -18865,7 +18595,7 @@
             <a:endParaRPr lang="en-US" sz="1010" dirty="0"/>
           </a:p>
           <a:p>
-            <a:pPr algn="l" indent="0" marL="0">
+            <a:pPr marL="0" indent="0" algn="l">
               <a:buNone/>
             </a:pPr>
             <a:r>
@@ -18882,7 +18612,7 @@
             <a:endParaRPr lang="en-US" sz="1010" dirty="0"/>
           </a:p>
           <a:p>
-            <a:pPr algn="l" indent="0" marL="0">
+            <a:pPr marL="0" indent="0" algn="l">
               <a:buNone/>
             </a:pPr>
             <a:r>
@@ -18899,7 +18629,7 @@
             <a:endParaRPr lang="en-US" sz="1010" dirty="0"/>
           </a:p>
           <a:p>
-            <a:pPr algn="l" indent="0" marL="0">
+            <a:pPr marL="0" indent="0" algn="l">
               <a:buNone/>
             </a:pPr>
             <a:r>
@@ -18967,7 +18697,7 @@
           </a:bodyPr>
           <a:lstStyle/>
           <a:p>
-            <a:pPr algn="ctr" indent="0" marL="0">
+            <a:pPr marL="0" indent="0" algn="ctr">
               <a:buNone/>
             </a:pPr>
             <a:r>
@@ -19008,7 +18738,7 @@
           </a:bodyPr>
           <a:lstStyle/>
           <a:p>
-            <a:pPr algn="l" indent="0" marL="0">
+            <a:pPr marL="0" indent="0" algn="l">
               <a:buNone/>
             </a:pPr>
             <a:r>
@@ -19042,6 +18772,7 @@
         <a:solidFill>
           <a:srgbClr val="F8FAFC"/>
         </a:solidFill>
+        <a:effectLst/>
       </p:bgPr>
     </p:bg>
     <p:spTree>
@@ -19110,7 +18841,7 @@
           </a:bodyPr>
           <a:lstStyle/>
           <a:p>
-            <a:pPr algn="ctr" indent="0" marL="0">
+            <a:pPr marL="0" indent="0" algn="ctr">
               <a:buNone/>
             </a:pPr>
             <a:r>
@@ -19151,7 +18882,7 @@
           </a:bodyPr>
           <a:lstStyle/>
           <a:p>
-            <a:pPr algn="l" indent="0" marL="0">
+            <a:pPr marL="0" indent="0" algn="l">
               <a:buNone/>
             </a:pPr>
             <a:r>
@@ -19192,7 +18923,7 @@
           </a:bodyPr>
           <a:lstStyle/>
           <a:p>
-            <a:pPr algn="l" indent="0" marL="0">
+            <a:pPr marL="0" indent="0" algn="l">
               <a:buNone/>
             </a:pPr>
             <a:r>
@@ -19289,7 +19020,7 @@
           </a:bodyPr>
           <a:lstStyle/>
           <a:p>
-            <a:pPr algn="ctr" indent="0" marL="0">
+            <a:pPr marL="0" indent="0" algn="ctr">
               <a:buNone/>
             </a:pPr>
             <a:r>
@@ -19333,7 +19064,7 @@
             <a:prstDash val="solid"/>
           </a:ln>
           <a:effectLst>
-            <a:outerShdw sx="100000" sy="100000" kx="0" ky="0" algn="bl" rotWithShape="0" blurRad="12700" dist="50800" dir="2700000">
+            <a:outerShdw blurRad="12700" dist="50800" dir="2700000" algn="bl" rotWithShape="0">
               <a:srgbClr val="000000">
                 <a:alpha val="10000"/>
               </a:srgbClr>
@@ -19364,7 +19095,7 @@
           </a:bodyPr>
           <a:lstStyle/>
           <a:p>
-            <a:pPr algn="ctr" indent="0" marL="0">
+            <a:pPr marL="0" indent="0" algn="ctr">
               <a:buNone/>
             </a:pPr>
             <a:r>
@@ -19433,7 +19164,7 @@
             <a:prstDash val="solid"/>
           </a:ln>
           <a:effectLst>
-            <a:outerShdw sx="100000" sy="100000" kx="0" ky="0" algn="bl" rotWithShape="0" blurRad="12700" dist="50800" dir="2700000">
+            <a:outerShdw blurRad="12700" dist="50800" dir="2700000" algn="bl" rotWithShape="0">
               <a:srgbClr val="000000">
                 <a:alpha val="10000"/>
               </a:srgbClr>
@@ -19464,7 +19195,7 @@
           </a:bodyPr>
           <a:lstStyle/>
           <a:p>
-            <a:pPr algn="ctr" indent="0" marL="0">
+            <a:pPr marL="0" indent="0" algn="ctr">
               <a:buNone/>
             </a:pPr>
             <a:r>
@@ -19533,7 +19264,7 @@
             <a:prstDash val="solid"/>
           </a:ln>
           <a:effectLst>
-            <a:outerShdw sx="100000" sy="100000" kx="0" ky="0" algn="bl" rotWithShape="0" blurRad="12700" dist="50800" dir="2700000">
+            <a:outerShdw blurRad="12700" dist="50800" dir="2700000" algn="bl" rotWithShape="0">
               <a:srgbClr val="000000">
                 <a:alpha val="10000"/>
               </a:srgbClr>
@@ -19564,7 +19295,7 @@
           </a:bodyPr>
           <a:lstStyle/>
           <a:p>
-            <a:pPr algn="ctr" indent="0" marL="0">
+            <a:pPr marL="0" indent="0" algn="ctr">
               <a:buNone/>
             </a:pPr>
             <a:r>
@@ -19633,7 +19364,7 @@
             <a:prstDash val="solid"/>
           </a:ln>
           <a:effectLst>
-            <a:outerShdw sx="100000" sy="100000" kx="0" ky="0" algn="bl" rotWithShape="0" blurRad="12700" dist="50800" dir="2700000">
+            <a:outerShdw blurRad="12700" dist="50800" dir="2700000" algn="bl" rotWithShape="0">
               <a:srgbClr val="000000">
                 <a:alpha val="10000"/>
               </a:srgbClr>
@@ -19664,7 +19395,7 @@
           </a:bodyPr>
           <a:lstStyle/>
           <a:p>
-            <a:pPr algn="ctr" indent="0" marL="0">
+            <a:pPr marL="0" indent="0" algn="ctr">
               <a:buNone/>
             </a:pPr>
             <a:r>
@@ -19733,7 +19464,7 @@
             <a:prstDash val="solid"/>
           </a:ln>
           <a:effectLst>
-            <a:outerShdw sx="100000" sy="100000" kx="0" ky="0" algn="bl" rotWithShape="0" blurRad="12700" dist="50800" dir="2700000">
+            <a:outerShdw blurRad="12700" dist="50800" dir="2700000" algn="bl" rotWithShape="0">
               <a:srgbClr val="000000">
                 <a:alpha val="10000"/>
               </a:srgbClr>
@@ -19764,7 +19495,7 @@
           </a:bodyPr>
           <a:lstStyle/>
           <a:p>
-            <a:pPr algn="ctr" indent="0" marL="0">
+            <a:pPr marL="0" indent="0" algn="ctr">
               <a:buNone/>
             </a:pPr>
             <a:r>
@@ -19833,7 +19564,7 @@
             <a:prstDash val="solid"/>
           </a:ln>
           <a:effectLst>
-            <a:outerShdw sx="100000" sy="100000" kx="0" ky="0" algn="bl" rotWithShape="0" blurRad="12700" dist="50800" dir="2700000">
+            <a:outerShdw blurRad="12700" dist="50800" dir="2700000" algn="bl" rotWithShape="0">
               <a:srgbClr val="000000">
                 <a:alpha val="10000"/>
               </a:srgbClr>
@@ -19864,7 +19595,7 @@
           </a:bodyPr>
           <a:lstStyle/>
           <a:p>
-            <a:pPr algn="ctr" indent="0" marL="0">
+            <a:pPr marL="0" indent="0" algn="ctr">
               <a:buNone/>
             </a:pPr>
             <a:r>
@@ -19908,7 +19639,7 @@
             <a:prstDash val="solid"/>
           </a:ln>
           <a:effectLst>
-            <a:outerShdw sx="100000" sy="100000" kx="0" ky="0" algn="bl" rotWithShape="0" blurRad="12700" dist="50800" dir="2700000">
+            <a:outerShdw blurRad="12700" dist="50800" dir="2700000" algn="bl" rotWithShape="0">
               <a:srgbClr val="000000">
                 <a:alpha val="10000"/>
               </a:srgbClr>
@@ -19966,7 +19697,7 @@
           </a:bodyPr>
           <a:lstStyle/>
           <a:p>
-            <a:pPr algn="l" indent="0" marL="0">
+            <a:pPr marL="0" indent="0" algn="l">
               <a:buNone/>
             </a:pPr>
             <a:r>
@@ -20007,7 +19738,7 @@
           </a:bodyPr>
           <a:lstStyle/>
           <a:p>
-            <a:pPr algn="l" indent="0" marL="0">
+            <a:pPr marL="0" indent="0" algn="l">
               <a:buNone/>
             </a:pPr>
             <a:r>
@@ -20051,7 +19782,7 @@
             <a:prstDash val="solid"/>
           </a:ln>
           <a:effectLst>
-            <a:outerShdw sx="100000" sy="100000" kx="0" ky="0" algn="bl" rotWithShape="0" blurRad="12700" dist="50800" dir="2700000">
+            <a:outerShdw blurRad="12700" dist="50800" dir="2700000" algn="bl" rotWithShape="0">
               <a:srgbClr val="000000">
                 <a:alpha val="10000"/>
               </a:srgbClr>
@@ -20109,7 +19840,7 @@
           </a:bodyPr>
           <a:lstStyle/>
           <a:p>
-            <a:pPr algn="l" indent="0" marL="0">
+            <a:pPr marL="0" indent="0" algn="l">
               <a:buNone/>
             </a:pPr>
             <a:r>
@@ -20150,7 +19881,7 @@
           </a:bodyPr>
           <a:lstStyle/>
           <a:p>
-            <a:pPr algn="l" indent="0" marL="0">
+            <a:pPr marL="0" indent="0" algn="l">
               <a:buNone/>
             </a:pPr>
             <a:r>
@@ -20194,7 +19925,7 @@
             <a:prstDash val="solid"/>
           </a:ln>
           <a:effectLst>
-            <a:outerShdw sx="100000" sy="100000" kx="0" ky="0" algn="bl" rotWithShape="0" blurRad="12700" dist="50800" dir="2700000">
+            <a:outerShdw blurRad="12700" dist="50800" dir="2700000" algn="bl" rotWithShape="0">
               <a:srgbClr val="000000">
                 <a:alpha val="10000"/>
               </a:srgbClr>
@@ -20252,7 +19983,7 @@
           </a:bodyPr>
           <a:lstStyle/>
           <a:p>
-            <a:pPr algn="l" indent="0" marL="0">
+            <a:pPr marL="0" indent="0" algn="l">
               <a:buNone/>
             </a:pPr>
             <a:r>
@@ -20293,7 +20024,7 @@
           </a:bodyPr>
           <a:lstStyle/>
           <a:p>
-            <a:pPr algn="l" indent="0" marL="0">
+            <a:pPr marL="0" indent="0" algn="l">
               <a:buNone/>
             </a:pPr>
             <a:r>
@@ -20334,7 +20065,7 @@
           </a:bodyPr>
           <a:lstStyle/>
           <a:p>
-            <a:pPr algn="l" indent="0" marL="0">
+            <a:pPr marL="0" indent="0" algn="l">
               <a:buNone/>
             </a:pPr>
             <a:r>
@@ -20368,6 +20099,7 @@
         <a:solidFill>
           <a:srgbClr val="F8FAFC"/>
         </a:solidFill>
+        <a:effectLst/>
       </p:bgPr>
     </p:bg>
     <p:spTree>
@@ -20436,7 +20168,7 @@
           </a:bodyPr>
           <a:lstStyle/>
           <a:p>
-            <a:pPr algn="ctr" indent="0" marL="0">
+            <a:pPr marL="0" indent="0" algn="ctr">
               <a:buNone/>
             </a:pPr>
             <a:r>
@@ -20477,7 +20209,7 @@
           </a:bodyPr>
           <a:lstStyle/>
           <a:p>
-            <a:pPr algn="l" indent="0" marL="0">
+            <a:pPr marL="0" indent="0" algn="l">
               <a:buNone/>
             </a:pPr>
             <a:r>
@@ -20518,7 +20250,7 @@
           </a:bodyPr>
           <a:lstStyle/>
           <a:p>
-            <a:pPr algn="l" indent="0" marL="0">
+            <a:pPr marL="0" indent="0" algn="l">
               <a:buNone/>
             </a:pPr>
             <a:r>
@@ -20615,7 +20347,7 @@
           </a:bodyPr>
           <a:lstStyle/>
           <a:p>
-            <a:pPr algn="ctr" indent="0" marL="0">
+            <a:pPr marL="0" indent="0" algn="ctr">
               <a:buNone/>
             </a:pPr>
             <a:r>
@@ -20659,7 +20391,7 @@
             <a:prstDash val="solid"/>
           </a:ln>
           <a:effectLst>
-            <a:outerShdw sx="100000" sy="100000" kx="0" ky="0" algn="bl" rotWithShape="0" blurRad="12700" dist="50800" dir="2700000">
+            <a:outerShdw blurRad="12700" dist="50800" dir="2700000" algn="bl" rotWithShape="0">
               <a:srgbClr val="000000">
                 <a:alpha val="10000"/>
               </a:srgbClr>
@@ -20717,7 +20449,7 @@
           </a:bodyPr>
           <a:lstStyle/>
           <a:p>
-            <a:pPr algn="l" indent="0" marL="0">
+            <a:pPr marL="0" indent="0" algn="l">
               <a:buNone/>
             </a:pPr>
             <a:r>
@@ -20758,7 +20490,7 @@
           </a:bodyPr>
           <a:lstStyle/>
           <a:p>
-            <a:pPr algn="l" indent="0" marL="0">
+            <a:pPr marL="0" indent="0" algn="l">
               <a:buNone/>
             </a:pPr>
             <a:r>
@@ -20775,7 +20507,7 @@
             <a:endParaRPr lang="en-US" sz="1010" dirty="0"/>
           </a:p>
           <a:p>
-            <a:pPr algn="l" indent="0" marL="0">
+            <a:pPr marL="0" indent="0" algn="l">
               <a:buNone/>
             </a:pPr>
             <a:r>
@@ -20792,7 +20524,7 @@
             <a:endParaRPr lang="en-US" sz="1010" dirty="0"/>
           </a:p>
           <a:p>
-            <a:pPr algn="l" indent="0" marL="0">
+            <a:pPr marL="0" indent="0" algn="l">
               <a:buNone/>
             </a:pPr>
             <a:r>
@@ -20836,7 +20568,7 @@
             <a:prstDash val="solid"/>
           </a:ln>
           <a:effectLst>
-            <a:outerShdw sx="100000" sy="100000" kx="0" ky="0" algn="bl" rotWithShape="0" blurRad="12700" dist="50800" dir="2700000">
+            <a:outerShdw blurRad="12700" dist="50800" dir="2700000" algn="bl" rotWithShape="0">
               <a:srgbClr val="000000">
                 <a:alpha val="10000"/>
               </a:srgbClr>
@@ -20894,7 +20626,7 @@
           </a:bodyPr>
           <a:lstStyle/>
           <a:p>
-            <a:pPr algn="l" indent="0" marL="0">
+            <a:pPr marL="0" indent="0" algn="l">
               <a:buNone/>
             </a:pPr>
             <a:r>
@@ -20935,7 +20667,7 @@
           </a:bodyPr>
           <a:lstStyle/>
           <a:p>
-            <a:pPr algn="l" indent="0" marL="0">
+            <a:pPr marL="0" indent="0" algn="l">
               <a:buNone/>
             </a:pPr>
             <a:r>
@@ -20952,7 +20684,7 @@
             <a:endParaRPr lang="en-US" sz="1010" dirty="0"/>
           </a:p>
           <a:p>
-            <a:pPr algn="l" indent="0" marL="0">
+            <a:pPr marL="0" indent="0" algn="l">
               <a:buNone/>
             </a:pPr>
             <a:r>
@@ -20969,7 +20701,7 @@
             <a:endParaRPr lang="en-US" sz="1010" dirty="0"/>
           </a:p>
           <a:p>
-            <a:pPr algn="l" indent="0" marL="0">
+            <a:pPr marL="0" indent="0" algn="l">
               <a:buNone/>
             </a:pPr>
             <a:r>
@@ -21013,7 +20745,7 @@
             <a:prstDash val="solid"/>
           </a:ln>
           <a:effectLst>
-            <a:outerShdw sx="100000" sy="100000" kx="0" ky="0" algn="bl" rotWithShape="0" blurRad="12700" dist="50800" dir="2700000">
+            <a:outerShdw blurRad="12700" dist="50800" dir="2700000" algn="bl" rotWithShape="0">
               <a:srgbClr val="000000">
                 <a:alpha val="10000"/>
               </a:srgbClr>
@@ -21071,7 +20803,7 @@
           </a:bodyPr>
           <a:lstStyle/>
           <a:p>
-            <a:pPr algn="l" indent="0" marL="0">
+            <a:pPr marL="0" indent="0" algn="l">
               <a:buNone/>
             </a:pPr>
             <a:r>
@@ -21112,7 +20844,7 @@
           </a:bodyPr>
           <a:lstStyle/>
           <a:p>
-            <a:pPr algn="l" indent="0" marL="0">
+            <a:pPr marL="0" indent="0" algn="l">
               <a:buNone/>
             </a:pPr>
             <a:r>
@@ -21129,7 +20861,7 @@
             <a:endParaRPr lang="en-US" sz="1010" dirty="0"/>
           </a:p>
           <a:p>
-            <a:pPr algn="l" indent="0" marL="0">
+            <a:pPr marL="0" indent="0" algn="l">
               <a:buNone/>
             </a:pPr>
             <a:r>
@@ -21146,7 +20878,7 @@
             <a:endParaRPr lang="en-US" sz="1010" dirty="0"/>
           </a:p>
           <a:p>
-            <a:pPr algn="l" indent="0" marL="0">
+            <a:pPr marL="0" indent="0" algn="l">
               <a:buNone/>
             </a:pPr>
             <a:r>
@@ -21163,7 +20895,7 @@
             <a:endParaRPr lang="en-US" sz="1010" dirty="0"/>
           </a:p>
           <a:p>
-            <a:pPr algn="l" indent="0" marL="0">
+            <a:pPr marL="0" indent="0" algn="l">
               <a:buNone/>
             </a:pPr>
             <a:r>
@@ -21204,7 +20936,7 @@
           </a:bodyPr>
           <a:lstStyle/>
           <a:p>
-            <a:pPr algn="ctr" indent="0" marL="0">
+            <a:pPr marL="0" indent="0" algn="ctr">
               <a:buNone/>
             </a:pPr>
             <a:r>
@@ -21245,7 +20977,7 @@
           </a:bodyPr>
           <a:lstStyle/>
           <a:p>
-            <a:pPr algn="l" indent="0" marL="0">
+            <a:pPr marL="0" indent="0" algn="l">
               <a:buNone/>
             </a:pPr>
             <a:r>
@@ -21564,4 +21296,319 @@
     </a:ext>
   </a:extLst>
 </a:theme>
+</file>
+
+<file path=ppt/theme/theme2.xml><?xml version="1.0" encoding="utf-8"?>
+<a:theme xmlns:a="http://schemas.openxmlformats.org/drawingml/2006/main" name="Office 主题​​">
+  <a:themeElements>
+    <a:clrScheme name="Office">
+      <a:dk1>
+        <a:sysClr val="windowText" lastClr="000000"/>
+      </a:dk1>
+      <a:lt1>
+        <a:sysClr val="window" lastClr="FFFFFF"/>
+      </a:lt1>
+      <a:dk2>
+        <a:srgbClr val="0E2841"/>
+      </a:dk2>
+      <a:lt2>
+        <a:srgbClr val="E8E8E8"/>
+      </a:lt2>
+      <a:accent1>
+        <a:srgbClr val="156082"/>
+      </a:accent1>
+      <a:accent2>
+        <a:srgbClr val="E97132"/>
+      </a:accent2>
+      <a:accent3>
+        <a:srgbClr val="196B24"/>
+      </a:accent3>
+      <a:accent4>
+        <a:srgbClr val="0F9ED5"/>
+      </a:accent4>
+      <a:accent5>
+        <a:srgbClr val="A02B93"/>
+      </a:accent5>
+      <a:accent6>
+        <a:srgbClr val="4EA72E"/>
+      </a:accent6>
+      <a:hlink>
+        <a:srgbClr val="467886"/>
+      </a:hlink>
+      <a:folHlink>
+        <a:srgbClr val="96607D"/>
+      </a:folHlink>
+    </a:clrScheme>
+    <a:fontScheme name="Office">
+      <a:majorFont>
+        <a:latin typeface="等线 Light" panose="02110004020202020204"/>
+        <a:ea typeface=""/>
+        <a:cs typeface=""/>
+        <a:font script="Jpan" typeface="游ゴシック Light"/>
+        <a:font script="Hang" typeface="맑은 고딕"/>
+        <a:font script="Hans" typeface="等线 Light"/>
+        <a:font script="Hant" typeface="新細明體"/>
+        <a:font script="Arab" typeface="Times New Roman"/>
+        <a:font script="Hebr" typeface="Times New Roman"/>
+        <a:font script="Thai" typeface="Angsana New"/>
+        <a:font script="Ethi" typeface="Nyala"/>
+        <a:font script="Beng" typeface="Vrinda"/>
+        <a:font script="Gujr" typeface="Shruti"/>
+        <a:font script="Khmr" typeface="MoolBoran"/>
+        <a:font script="Knda" typeface="Tunga"/>
+        <a:font script="Guru" typeface="Raavi"/>
+        <a:font script="Cans" typeface="Euphemia"/>
+        <a:font script="Cher" typeface="Plantagenet Cherokee"/>
+        <a:font script="Yiii" typeface="Microsoft Yi Baiti"/>
+        <a:font script="Tibt" typeface="Microsoft Himalaya"/>
+        <a:font script="Thaa" typeface="MV Boli"/>
+        <a:font script="Deva" typeface="Mangal"/>
+        <a:font script="Telu" typeface="Gautami"/>
+        <a:font script="Taml" typeface="Latha"/>
+        <a:font script="Syrc" typeface="Estrangelo Edessa"/>
+        <a:font script="Orya" typeface="Kalinga"/>
+        <a:font script="Mlym" typeface="Kartika"/>
+        <a:font script="Laoo" typeface="DokChampa"/>
+        <a:font script="Sinh" typeface="Iskoola Pota"/>
+        <a:font script="Mong" typeface="Mongolian Baiti"/>
+        <a:font script="Viet" typeface="Times New Roman"/>
+        <a:font script="Uigh" typeface="Microsoft Uighur"/>
+        <a:font script="Geor" typeface="Sylfaen"/>
+        <a:font script="Armn" typeface="Arial"/>
+        <a:font script="Bugi" typeface="Leelawadee UI"/>
+        <a:font script="Bopo" typeface="Microsoft JhengHei"/>
+        <a:font script="Java" typeface="Javanese Text"/>
+        <a:font script="Lisu" typeface="Segoe UI"/>
+        <a:font script="Mymr" typeface="Myanmar Text"/>
+        <a:font script="Nkoo" typeface="Ebrima"/>
+        <a:font script="Olck" typeface="Nirmala UI"/>
+        <a:font script="Osma" typeface="Ebrima"/>
+        <a:font script="Phag" typeface="Phagspa"/>
+        <a:font script="Syrn" typeface="Estrangelo Edessa"/>
+        <a:font script="Syrj" typeface="Estrangelo Edessa"/>
+        <a:font script="Syre" typeface="Estrangelo Edessa"/>
+        <a:font script="Sora" typeface="Nirmala UI"/>
+        <a:font script="Tale" typeface="Microsoft Tai Le"/>
+        <a:font script="Talu" typeface="Microsoft New Tai Lue"/>
+        <a:font script="Tfng" typeface="Ebrima"/>
+      </a:majorFont>
+      <a:minorFont>
+        <a:latin typeface="等线" panose="02110004020202020204"/>
+        <a:ea typeface=""/>
+        <a:cs typeface=""/>
+        <a:font script="Jpan" typeface="游ゴシック"/>
+        <a:font script="Hang" typeface="맑은 고딕"/>
+        <a:font script="Hans" typeface="等线"/>
+        <a:font script="Hant" typeface="新細明體"/>
+        <a:font script="Arab" typeface="Arial"/>
+        <a:font script="Hebr" typeface="Arial"/>
+        <a:font script="Thai" typeface="Cordia New"/>
+        <a:font script="Ethi" typeface="Nyala"/>
+        <a:font script="Beng" typeface="Vrinda"/>
+        <a:font script="Gujr" typeface="Shruti"/>
+        <a:font script="Khmr" typeface="DaunPenh"/>
+        <a:font script="Knda" typeface="Tunga"/>
+        <a:font script="Guru" typeface="Raavi"/>
+        <a:font script="Cans" typeface="Euphemia"/>
+        <a:font script="Cher" typeface="Plantagenet Cherokee"/>
+        <a:font script="Yiii" typeface="Microsoft Yi Baiti"/>
+        <a:font script="Tibt" typeface="Microsoft Himalaya"/>
+        <a:font script="Thaa" typeface="MV Boli"/>
+        <a:font script="Deva" typeface="Mangal"/>
+        <a:font script="Telu" typeface="Gautami"/>
+        <a:font script="Taml" typeface="Latha"/>
+        <a:font script="Syrc" typeface="Estrangelo Edessa"/>
+        <a:font script="Orya" typeface="Kalinga"/>
+        <a:font script="Mlym" typeface="Kartika"/>
+        <a:font script="Laoo" typeface="DokChampa"/>
+        <a:font script="Sinh" typeface="Iskoola Pota"/>
+        <a:font script="Mong" typeface="Mongolian Baiti"/>
+        <a:font script="Viet" typeface="Arial"/>
+        <a:font script="Uigh" typeface="Microsoft Uighur"/>
+        <a:font script="Geor" typeface="Sylfaen"/>
+        <a:font script="Armn" typeface="Arial"/>
+        <a:font script="Bugi" typeface="Leelawadee UI"/>
+        <a:font script="Bopo" typeface="Microsoft JhengHei"/>
+        <a:font script="Java" typeface="Javanese Text"/>
+        <a:font script="Lisu" typeface="Segoe UI"/>
+        <a:font script="Mymr" typeface="Myanmar Text"/>
+        <a:font script="Nkoo" typeface="Ebrima"/>
+        <a:font script="Olck" typeface="Nirmala UI"/>
+        <a:font script="Osma" typeface="Ebrima"/>
+        <a:font script="Phag" typeface="Phagspa"/>
+        <a:font script="Syrn" typeface="Estrangelo Edessa"/>
+        <a:font script="Syrj" typeface="Estrangelo Edessa"/>
+        <a:font script="Syre" typeface="Estrangelo Edessa"/>
+        <a:font script="Sora" typeface="Nirmala UI"/>
+        <a:font script="Tale" typeface="Microsoft Tai Le"/>
+        <a:font script="Talu" typeface="Microsoft New Tai Lue"/>
+        <a:font script="Tfng" typeface="Ebrima"/>
+      </a:minorFont>
+    </a:fontScheme>
+    <a:fmtScheme name="Office">
+      <a:fillStyleLst>
+        <a:solidFill>
+          <a:schemeClr val="phClr"/>
+        </a:solidFill>
+        <a:gradFill rotWithShape="1">
+          <a:gsLst>
+            <a:gs pos="0">
+              <a:schemeClr val="phClr">
+                <a:lumMod val="110000"/>
+                <a:satMod val="105000"/>
+                <a:tint val="67000"/>
+              </a:schemeClr>
+            </a:gs>
+            <a:gs pos="50000">
+              <a:schemeClr val="phClr">
+                <a:lumMod val="105000"/>
+                <a:satMod val="103000"/>
+                <a:tint val="73000"/>
+              </a:schemeClr>
+            </a:gs>
+            <a:gs pos="100000">
+              <a:schemeClr val="phClr">
+                <a:lumMod val="105000"/>
+                <a:satMod val="109000"/>
+                <a:tint val="81000"/>
+              </a:schemeClr>
+            </a:gs>
+          </a:gsLst>
+          <a:lin ang="5400000" scaled="0"/>
+        </a:gradFill>
+        <a:gradFill rotWithShape="1">
+          <a:gsLst>
+            <a:gs pos="0">
+              <a:schemeClr val="phClr">
+                <a:satMod val="103000"/>
+                <a:lumMod val="102000"/>
+                <a:tint val="94000"/>
+              </a:schemeClr>
+            </a:gs>
+            <a:gs pos="50000">
+              <a:schemeClr val="phClr">
+                <a:satMod val="110000"/>
+                <a:lumMod val="100000"/>
+                <a:shade val="100000"/>
+              </a:schemeClr>
+            </a:gs>
+            <a:gs pos="100000">
+              <a:schemeClr val="phClr">
+                <a:lumMod val="99000"/>
+                <a:satMod val="120000"/>
+                <a:shade val="78000"/>
+              </a:schemeClr>
+            </a:gs>
+          </a:gsLst>
+          <a:lin ang="5400000" scaled="0"/>
+        </a:gradFill>
+      </a:fillStyleLst>
+      <a:lnStyleLst>
+        <a:ln w="12700" cap="flat" cmpd="sng" algn="ctr">
+          <a:solidFill>
+            <a:schemeClr val="phClr"/>
+          </a:solidFill>
+          <a:prstDash val="solid"/>
+          <a:miter lim="800000"/>
+        </a:ln>
+        <a:ln w="19050" cap="flat" cmpd="sng" algn="ctr">
+          <a:solidFill>
+            <a:schemeClr val="phClr"/>
+          </a:solidFill>
+          <a:prstDash val="solid"/>
+          <a:miter lim="800000"/>
+        </a:ln>
+        <a:ln w="25400" cap="flat" cmpd="sng" algn="ctr">
+          <a:solidFill>
+            <a:schemeClr val="phClr"/>
+          </a:solidFill>
+          <a:prstDash val="solid"/>
+          <a:miter lim="800000"/>
+        </a:ln>
+      </a:lnStyleLst>
+      <a:effectStyleLst>
+        <a:effectStyle>
+          <a:effectLst/>
+        </a:effectStyle>
+        <a:effectStyle>
+          <a:effectLst/>
+        </a:effectStyle>
+        <a:effectStyle>
+          <a:effectLst>
+            <a:outerShdw blurRad="57150" dist="19050" dir="5400000" algn="ctr" rotWithShape="0">
+              <a:srgbClr val="000000">
+                <a:alpha val="63000"/>
+              </a:srgbClr>
+            </a:outerShdw>
+          </a:effectLst>
+        </a:effectStyle>
+      </a:effectStyleLst>
+      <a:bgFillStyleLst>
+        <a:solidFill>
+          <a:schemeClr val="phClr"/>
+        </a:solidFill>
+        <a:solidFill>
+          <a:schemeClr val="phClr">
+            <a:tint val="95000"/>
+            <a:satMod val="170000"/>
+          </a:schemeClr>
+        </a:solidFill>
+        <a:gradFill rotWithShape="1">
+          <a:gsLst>
+            <a:gs pos="0">
+              <a:schemeClr val="phClr">
+                <a:tint val="93000"/>
+                <a:satMod val="150000"/>
+                <a:shade val="98000"/>
+                <a:lumMod val="102000"/>
+              </a:schemeClr>
+            </a:gs>
+            <a:gs pos="50000">
+              <a:schemeClr val="phClr">
+                <a:tint val="98000"/>
+                <a:satMod val="130000"/>
+                <a:shade val="90000"/>
+                <a:lumMod val="103000"/>
+              </a:schemeClr>
+            </a:gs>
+            <a:gs pos="100000">
+              <a:schemeClr val="phClr">
+                <a:shade val="63000"/>
+                <a:satMod val="120000"/>
+              </a:schemeClr>
+            </a:gs>
+          </a:gsLst>
+          <a:lin ang="5400000" scaled="0"/>
+        </a:gradFill>
+      </a:bgFillStyleLst>
+    </a:fmtScheme>
+  </a:themeElements>
+  <a:objectDefaults>
+    <a:lnDef>
+      <a:spPr/>
+      <a:bodyPr/>
+      <a:lstStyle/>
+      <a:style>
+        <a:lnRef idx="2">
+          <a:schemeClr val="accent1"/>
+        </a:lnRef>
+        <a:fillRef idx="0">
+          <a:schemeClr val="accent1"/>
+        </a:fillRef>
+        <a:effectRef idx="1">
+          <a:schemeClr val="accent1"/>
+        </a:effectRef>
+        <a:fontRef idx="minor">
+          <a:schemeClr val="tx1"/>
+        </a:fontRef>
+      </a:style>
+    </a:lnDef>
+  </a:objectDefaults>
+  <a:extraClrSchemeLst/>
+  <a:extLst>
+    <a:ext uri="{05A4C25C-085E-4340-85A3-A5531E510DB2}">
+      <thm15:themeFamily xmlns:thm15="http://schemas.microsoft.com/office/thememl/2012/main" name="Office Theme" id="{2E142A2C-CD16-42D6-873A-C26D2A0506FA}" vid="{1BDDFF52-6CD6-40A5-AB3C-68EB2F1E4D0A}"/>
+    </a:ext>
+  </a:extLst>
+</a:theme>
 </file>